--- a/docs/theme-preview/pptx/data.pptx
+++ b/docs/theme-preview/pptx/data.pptx
@@ -13497,7 +13497,7 @@
                 <a:ea typeface="Pretendard" pitchFamily="34" charset="-122"/>
                 <a:cs typeface="Pretendard" pitchFamily="34" charset="-120"/>
               </a:rPr>
-              <a:t>Markdown Semantics</a:t>
+              <a:t>Semantic Blocks</a:t>
             </a:r>
             <a:endParaRPr lang="en-US" sz="2200" dirty="0"/>
           </a:p>
@@ -18038,7 +18038,7 @@
                 <a:ea typeface="Pretendard" pitchFamily="34" charset="-122"/>
                 <a:cs typeface="Pretendard" pitchFamily="34" charset="-120"/>
               </a:rPr>
-              <a:t>Markdown Semantics</a:t>
+              <a:t>Semantic Blocks</a:t>
             </a:r>
             <a:endParaRPr lang="en-US" sz="3400" dirty="0"/>
           </a:p>

--- a/docs/theme-preview/pptx/data.pptx
+++ b/docs/theme-preview/pptx/data.pptx
@@ -125,7 +125,7 @@
 </p:presentation>
 </file>
 
-<file path=ppt/charts/chart11.xml><?xml version="1.0" encoding="utf-8"?>
+<file path=ppt/charts/chart9.xml><?xml version="1.0" encoding="utf-8"?>
 <c:chartSpace xmlns:c="http://schemas.openxmlformats.org/drawingml/2006/chart" xmlns:a="http://schemas.openxmlformats.org/drawingml/2006/main" xmlns:r="http://schemas.openxmlformats.org/officeDocument/2006/relationships">
   <c:date1904 val="0"/>
   <c:roundedCorners val="1"/>
@@ -12367,8 +12367,37 @@
         </p:nvSpPr>
         <p:spPr>
           <a:xfrm>
-            <a:off x="914400" y="1417320"/>
-            <a:ext cx="73152" cy="868680"/>
+            <a:off x="786384" y="1956816"/>
+            <a:ext cx="32004" cy="3483864"/>
+          </a:xfrm>
+          <a:prstGeom prst="rect">
+            <a:avLst/>
+          </a:prstGeom>
+          <a:solidFill>
+            <a:srgbClr val="38BDF8">
+              <a:alpha val="80000"/>
+            </a:srgbClr>
+          </a:solidFill>
+          <a:ln w="12700">
+            <a:solidFill>
+              <a:srgbClr val="38BDF8">
+                <a:alpha val="0"/>
+              </a:srgbClr>
+            </a:solidFill>
+            <a:prstDash val="solid"/>
+          </a:ln>
+        </p:spPr>
+      </p:sp>
+      <p:sp>
+        <p:nvSpPr>
+          <p:cNvPr id="14" name="Shape 12"/>
+          <p:cNvSpPr/>
+          <p:nvPr/>
+        </p:nvSpPr>
+        <p:spPr>
+          <a:xfrm>
+            <a:off x="914400" y="1865376"/>
+            <a:ext cx="73152" cy="1024128"/>
           </a:xfrm>
           <a:prstGeom prst="rect">
             <a:avLst/>
@@ -12388,14 +12417,14 @@
       </p:sp>
       <p:sp>
         <p:nvSpPr>
-          <p:cNvPr id="14" name="Shape 12"/>
-          <p:cNvSpPr/>
-          <p:nvPr/>
-        </p:nvSpPr>
-        <p:spPr>
-          <a:xfrm>
-            <a:off x="914400" y="2560320"/>
-            <a:ext cx="73152" cy="868680"/>
+          <p:cNvPr id="15" name="Shape 13"/>
+          <p:cNvSpPr/>
+          <p:nvPr/>
+        </p:nvSpPr>
+        <p:spPr>
+          <a:xfrm>
+            <a:off x="914400" y="3191256"/>
+            <a:ext cx="73152" cy="1024128"/>
           </a:xfrm>
           <a:prstGeom prst="rect">
             <a:avLst/>
@@ -12415,14 +12444,14 @@
       </p:sp>
       <p:sp>
         <p:nvSpPr>
-          <p:cNvPr id="15" name="Shape 13"/>
-          <p:cNvSpPr/>
-          <p:nvPr/>
-        </p:nvSpPr>
-        <p:spPr>
-          <a:xfrm>
-            <a:off x="914400" y="3703320"/>
-            <a:ext cx="73152" cy="868680"/>
+          <p:cNvPr id="16" name="Shape 14"/>
+          <p:cNvSpPr/>
+          <p:nvPr/>
+        </p:nvSpPr>
+        <p:spPr>
+          <a:xfrm>
+            <a:off x="914400" y="4507992"/>
+            <a:ext cx="73152" cy="1024128"/>
           </a:xfrm>
           <a:prstGeom prst="rect">
             <a:avLst/>
@@ -12442,7 +12471,7 @@
       </p:sp>
       <p:pic>
         <p:nvPicPr>
-          <p:cNvPr id="16" name="Image 0" descr="preencoded.png">    </p:cNvPr>
+          <p:cNvPr id="17" name="Image 0" descr="preencoded.png">    </p:cNvPr>
           <p:cNvPicPr>
             <a:picLocks noChangeAspect="1"/>
           </p:cNvPicPr>
@@ -12462,8 +12491,8 @@
         </p:blipFill>
         <p:spPr>
           <a:xfrm>
-            <a:off x="914400" y="1417320"/>
-            <a:ext cx="10241280" cy="868680"/>
+            <a:off x="914400" y="1865376"/>
+            <a:ext cx="10241280" cy="1024128"/>
           </a:xfrm>
           <a:prstGeom prst="rect">
             <a:avLst/>
@@ -12472,7 +12501,7 @@
       </p:pic>
       <p:pic>
         <p:nvPicPr>
-          <p:cNvPr id="17" name="Image 1" descr="preencoded.png">    </p:cNvPr>
+          <p:cNvPr id="18" name="Image 1" descr="preencoded.png">    </p:cNvPr>
           <p:cNvPicPr>
             <a:picLocks noChangeAspect="1"/>
           </p:cNvPicPr>
@@ -12492,8 +12521,8 @@
         </p:blipFill>
         <p:spPr>
           <a:xfrm>
-            <a:off x="914400" y="2560320"/>
-            <a:ext cx="10241280" cy="868680"/>
+            <a:off x="914400" y="3191256"/>
+            <a:ext cx="10241280" cy="1024128"/>
           </a:xfrm>
           <a:prstGeom prst="rect">
             <a:avLst/>
@@ -12502,7 +12531,7 @@
       </p:pic>
       <p:pic>
         <p:nvPicPr>
-          <p:cNvPr id="18" name="Image 2" descr="preencoded.png">    </p:cNvPr>
+          <p:cNvPr id="19" name="Image 2" descr="preencoded.png">    </p:cNvPr>
           <p:cNvPicPr>
             <a:picLocks noChangeAspect="1"/>
           </p:cNvPicPr>
@@ -12522,8 +12551,8 @@
         </p:blipFill>
         <p:spPr>
           <a:xfrm>
-            <a:off x="914400" y="3703320"/>
-            <a:ext cx="10241280" cy="868680"/>
+            <a:off x="914400" y="4507992"/>
+            <a:ext cx="10241280" cy="1024128"/>
           </a:xfrm>
           <a:prstGeom prst="rect">
             <a:avLst/>
@@ -12532,7 +12561,7 @@
       </p:pic>
       <p:sp>
         <p:nvSpPr>
-          <p:cNvPr id="19" name="Text 14"/>
+          <p:cNvPr id="20" name="Text 15"/>
           <p:cNvSpPr txBox="1"/>
           <p:nvPr/>
         </p:nvSpPr>
@@ -12574,18 +12603,18 @@
       </p:sp>
       <p:sp>
         <p:nvSpPr>
-          <p:cNvPr id="20" name="Shape 15"/>
-          <p:cNvSpPr/>
-          <p:nvPr/>
-        </p:nvSpPr>
-        <p:spPr>
-          <a:xfrm>
-            <a:off x="1097280" y="1623060"/>
-            <a:ext cx="457200" cy="457200"/>
+          <p:cNvPr id="21" name="Shape 16"/>
+          <p:cNvSpPr/>
+          <p:nvPr/>
+        </p:nvSpPr>
+        <p:spPr>
+          <a:xfrm>
+            <a:off x="1097280" y="2140428"/>
+            <a:ext cx="474025" cy="474025"/>
           </a:xfrm>
           <a:prstGeom prst="roundRect">
             <a:avLst>
-              <a:gd name="adj" fmla="val 8000"/>
+              <a:gd name="adj" fmla="val 7716"/>
             </a:avLst>
           </a:prstGeom>
           <a:solidFill>
@@ -12601,7 +12630,7 @@
       </p:sp>
       <p:pic>
         <p:nvPicPr>
-          <p:cNvPr id="21" name="Image 3" descr="flow icon from tabler-icons (MIT)">    </p:cNvPr>
+          <p:cNvPr id="22" name="Image 3" descr="flow icon from tabler-icons (MIT)">    </p:cNvPr>
           <p:cNvPicPr>
             <a:picLocks noChangeAspect="1"/>
           </p:cNvPicPr>
@@ -12621,8 +12650,8 @@
         </p:blipFill>
         <p:spPr>
           <a:xfrm>
-            <a:off x="1170432" y="1696212"/>
-            <a:ext cx="310896" cy="310896"/>
+            <a:off x="1170432" y="2213580"/>
+            <a:ext cx="327721" cy="327721"/>
           </a:xfrm>
           <a:prstGeom prst="rect">
             <a:avLst/>
@@ -12631,14 +12660,14 @@
       </p:pic>
       <p:sp>
         <p:nvSpPr>
-          <p:cNvPr id="22" name="Text 16"/>
+          <p:cNvPr id="23" name="Text 17"/>
           <p:cNvSpPr txBox="1"/>
           <p:nvPr/>
         </p:nvSpPr>
         <p:spPr>
           <a:xfrm>
-            <a:off x="1682496" y="1508760"/>
-            <a:ext cx="9272016" cy="685800"/>
+            <a:off x="1699321" y="1957548"/>
+            <a:ext cx="9255191" cy="839785"/>
           </a:xfrm>
           <a:prstGeom prst="rect">
             <a:avLst/>
@@ -12690,18 +12719,18 @@
       </p:sp>
       <p:sp>
         <p:nvSpPr>
-          <p:cNvPr id="23" name="Shape 17"/>
-          <p:cNvSpPr/>
-          <p:nvPr/>
-        </p:nvSpPr>
-        <p:spPr>
-          <a:xfrm>
-            <a:off x="1097280" y="2766060"/>
-            <a:ext cx="457200" cy="457200"/>
+          <p:cNvPr id="24" name="Shape 18"/>
+          <p:cNvSpPr/>
+          <p:nvPr/>
+        </p:nvSpPr>
+        <p:spPr>
+          <a:xfrm>
+            <a:off x="1097280" y="3466308"/>
+            <a:ext cx="474025" cy="474025"/>
           </a:xfrm>
           <a:prstGeom prst="roundRect">
             <a:avLst>
-              <a:gd name="adj" fmla="val 8000"/>
+              <a:gd name="adj" fmla="val 7716"/>
             </a:avLst>
           </a:prstGeom>
           <a:solidFill>
@@ -12717,7 +12746,7 @@
       </p:sp>
       <p:pic>
         <p:nvPicPr>
-          <p:cNvPr id="24" name="Image 4" descr="verified icon from tabler-icons (MIT)">    </p:cNvPr>
+          <p:cNvPr id="25" name="Image 4" descr="verified icon from tabler-icons (MIT)">    </p:cNvPr>
           <p:cNvPicPr>
             <a:picLocks noChangeAspect="1"/>
           </p:cNvPicPr>
@@ -12737,8 +12766,8 @@
         </p:blipFill>
         <p:spPr>
           <a:xfrm>
-            <a:off x="1170432" y="2839212"/>
-            <a:ext cx="310896" cy="310896"/>
+            <a:off x="1170432" y="3539460"/>
+            <a:ext cx="327721" cy="327721"/>
           </a:xfrm>
           <a:prstGeom prst="rect">
             <a:avLst/>
@@ -12747,14 +12776,14 @@
       </p:pic>
       <p:sp>
         <p:nvSpPr>
-          <p:cNvPr id="25" name="Text 18"/>
+          <p:cNvPr id="26" name="Text 19"/>
           <p:cNvSpPr txBox="1"/>
           <p:nvPr/>
         </p:nvSpPr>
         <p:spPr>
           <a:xfrm>
-            <a:off x="1682496" y="2651760"/>
-            <a:ext cx="9272016" cy="685800"/>
+            <a:off x="1699321" y="3283428"/>
+            <a:ext cx="9255191" cy="839785"/>
           </a:xfrm>
           <a:prstGeom prst="rect">
             <a:avLst/>
@@ -12806,18 +12835,18 @@
       </p:sp>
       <p:sp>
         <p:nvSpPr>
-          <p:cNvPr id="26" name="Shape 19"/>
-          <p:cNvSpPr/>
-          <p:nvPr/>
-        </p:nvSpPr>
-        <p:spPr>
-          <a:xfrm>
-            <a:off x="1097280" y="3909060"/>
-            <a:ext cx="457200" cy="457200"/>
+          <p:cNvPr id="27" name="Shape 20"/>
+          <p:cNvSpPr/>
+          <p:nvPr/>
+        </p:nvSpPr>
+        <p:spPr>
+          <a:xfrm>
+            <a:off x="1097280" y="4783044"/>
+            <a:ext cx="474025" cy="474025"/>
           </a:xfrm>
           <a:prstGeom prst="roundRect">
             <a:avLst>
-              <a:gd name="adj" fmla="val 8000"/>
+              <a:gd name="adj" fmla="val 7716"/>
             </a:avLst>
           </a:prstGeom>
           <a:solidFill>
@@ -12833,7 +12862,7 @@
       </p:sp>
       <p:pic>
         <p:nvPicPr>
-          <p:cNvPr id="27" name="Image 5" descr="spark icon from tabler-icons (MIT)">    </p:cNvPr>
+          <p:cNvPr id="28" name="Image 5" descr="spark icon from tabler-icons (MIT)">    </p:cNvPr>
           <p:cNvPicPr>
             <a:picLocks noChangeAspect="1"/>
           </p:cNvPicPr>
@@ -12853,8 +12882,8 @@
         </p:blipFill>
         <p:spPr>
           <a:xfrm>
-            <a:off x="1170432" y="3982212"/>
-            <a:ext cx="310896" cy="310896"/>
+            <a:off x="1170432" y="4856196"/>
+            <a:ext cx="327721" cy="327721"/>
           </a:xfrm>
           <a:prstGeom prst="rect">
             <a:avLst/>
@@ -12863,14 +12892,14 @@
       </p:pic>
       <p:sp>
         <p:nvSpPr>
-          <p:cNvPr id="28" name="Text 20"/>
+          <p:cNvPr id="29" name="Text 21"/>
           <p:cNvSpPr txBox="1"/>
           <p:nvPr/>
         </p:nvSpPr>
         <p:spPr>
           <a:xfrm>
-            <a:off x="1682496" y="3794760"/>
-            <a:ext cx="9272016" cy="685800"/>
+            <a:off x="1699321" y="4600164"/>
+            <a:ext cx="9255191" cy="839785"/>
           </a:xfrm>
           <a:prstGeom prst="rect">
             <a:avLst/>
@@ -13274,8 +13303,8 @@
         </p:nvSpPr>
         <p:spPr>
           <a:xfrm>
-            <a:off x="914400" y="1463040"/>
-            <a:ext cx="10241280" cy="73152"/>
+            <a:off x="822960" y="1188720"/>
+            <a:ext cx="10515600" cy="45720"/>
           </a:xfrm>
           <a:prstGeom prst="rect">
             <a:avLst/>
@@ -13295,7 +13324,387 @@
       </p:sp>
       <p:sp>
         <p:nvSpPr>
-          <p:cNvPr id="14" name="Text 12"/>
+          <p:cNvPr id="14" name="Shape 12"/>
+          <p:cNvSpPr/>
+          <p:nvPr/>
+        </p:nvSpPr>
+        <p:spPr>
+          <a:xfrm>
+            <a:off x="822960" y="6199632"/>
+            <a:ext cx="2011680" cy="45720"/>
+          </a:xfrm>
+          <a:prstGeom prst="rect">
+            <a:avLst/>
+          </a:prstGeom>
+          <a:solidFill>
+            <a:srgbClr val="38BDF8"/>
+          </a:solidFill>
+          <a:ln w="12700">
+            <a:solidFill>
+              <a:srgbClr val="38BDF8">
+                <a:alpha val="0"/>
+              </a:srgbClr>
+            </a:solidFill>
+            <a:prstDash val="solid"/>
+          </a:ln>
+        </p:spPr>
+      </p:sp>
+      <p:sp>
+        <p:nvSpPr>
+          <p:cNvPr id="15" name="Shape 13"/>
+          <p:cNvSpPr/>
+          <p:nvPr/>
+        </p:nvSpPr>
+        <p:spPr>
+          <a:xfrm>
+            <a:off x="6080760" y="1389888"/>
+            <a:ext cx="22860" cy="4663440"/>
+          </a:xfrm>
+          <a:prstGeom prst="rect">
+            <a:avLst/>
+          </a:prstGeom>
+          <a:solidFill>
+            <a:srgbClr val="334155">
+              <a:alpha val="90000"/>
+            </a:srgbClr>
+          </a:solidFill>
+          <a:ln w="12700">
+            <a:solidFill>
+              <a:srgbClr val="334155">
+                <a:alpha val="0"/>
+              </a:srgbClr>
+            </a:solidFill>
+            <a:prstDash val="solid"/>
+          </a:ln>
+        </p:spPr>
+      </p:sp>
+      <p:sp>
+        <p:nvSpPr>
+          <p:cNvPr id="16" name="Shape 14"/>
+          <p:cNvSpPr/>
+          <p:nvPr/>
+        </p:nvSpPr>
+        <p:spPr>
+          <a:xfrm>
+            <a:off x="822960" y="1389888"/>
+            <a:ext cx="73152" cy="658368"/>
+          </a:xfrm>
+          <a:prstGeom prst="rect">
+            <a:avLst/>
+          </a:prstGeom>
+          <a:solidFill>
+            <a:srgbClr val="F59E0B"/>
+          </a:solidFill>
+          <a:ln w="12700">
+            <a:solidFill>
+              <a:srgbClr val="F59E0B">
+                <a:alpha val="0"/>
+              </a:srgbClr>
+            </a:solidFill>
+            <a:prstDash val="solid"/>
+          </a:ln>
+        </p:spPr>
+      </p:sp>
+      <p:sp>
+        <p:nvSpPr>
+          <p:cNvPr id="17" name="Shape 15"/>
+          <p:cNvSpPr/>
+          <p:nvPr/>
+        </p:nvSpPr>
+        <p:spPr>
+          <a:xfrm>
+            <a:off x="822960" y="2194560"/>
+            <a:ext cx="73152" cy="658368"/>
+          </a:xfrm>
+          <a:prstGeom prst="rect">
+            <a:avLst/>
+          </a:prstGeom>
+          <a:solidFill>
+            <a:srgbClr val="38BDF8"/>
+          </a:solidFill>
+          <a:ln w="12700">
+            <a:solidFill>
+              <a:srgbClr val="38BDF8">
+                <a:alpha val="0"/>
+              </a:srgbClr>
+            </a:solidFill>
+            <a:prstDash val="solid"/>
+          </a:ln>
+        </p:spPr>
+      </p:sp>
+      <p:sp>
+        <p:nvSpPr>
+          <p:cNvPr id="18" name="Shape 16"/>
+          <p:cNvSpPr/>
+          <p:nvPr/>
+        </p:nvSpPr>
+        <p:spPr>
+          <a:xfrm>
+            <a:off x="822960" y="2990088"/>
+            <a:ext cx="73152" cy="658368"/>
+          </a:xfrm>
+          <a:prstGeom prst="rect">
+            <a:avLst/>
+          </a:prstGeom>
+          <a:solidFill>
+            <a:srgbClr val="F59E0B"/>
+          </a:solidFill>
+          <a:ln w="12700">
+            <a:solidFill>
+              <a:srgbClr val="F59E0B">
+                <a:alpha val="0"/>
+              </a:srgbClr>
+            </a:solidFill>
+            <a:prstDash val="solid"/>
+          </a:ln>
+        </p:spPr>
+      </p:sp>
+      <p:sp>
+        <p:nvSpPr>
+          <p:cNvPr id="19" name="Shape 17"/>
+          <p:cNvSpPr/>
+          <p:nvPr/>
+        </p:nvSpPr>
+        <p:spPr>
+          <a:xfrm>
+            <a:off x="822960" y="3794760"/>
+            <a:ext cx="73152" cy="658368"/>
+          </a:xfrm>
+          <a:prstGeom prst="rect">
+            <a:avLst/>
+          </a:prstGeom>
+          <a:solidFill>
+            <a:srgbClr val="38BDF8"/>
+          </a:solidFill>
+          <a:ln w="12700">
+            <a:solidFill>
+              <a:srgbClr val="38BDF8">
+                <a:alpha val="0"/>
+              </a:srgbClr>
+            </a:solidFill>
+            <a:prstDash val="solid"/>
+          </a:ln>
+        </p:spPr>
+      </p:sp>
+      <p:sp>
+        <p:nvSpPr>
+          <p:cNvPr id="20" name="Shape 18"/>
+          <p:cNvSpPr/>
+          <p:nvPr/>
+        </p:nvSpPr>
+        <p:spPr>
+          <a:xfrm>
+            <a:off x="822960" y="4599432"/>
+            <a:ext cx="73152" cy="658368"/>
+          </a:xfrm>
+          <a:prstGeom prst="rect">
+            <a:avLst/>
+          </a:prstGeom>
+          <a:solidFill>
+            <a:srgbClr val="F59E0B"/>
+          </a:solidFill>
+          <a:ln w="12700">
+            <a:solidFill>
+              <a:srgbClr val="F59E0B">
+                <a:alpha val="0"/>
+              </a:srgbClr>
+            </a:solidFill>
+            <a:prstDash val="solid"/>
+          </a:ln>
+        </p:spPr>
+      </p:sp>
+      <p:sp>
+        <p:nvSpPr>
+          <p:cNvPr id="21" name="Shape 19"/>
+          <p:cNvSpPr/>
+          <p:nvPr/>
+        </p:nvSpPr>
+        <p:spPr>
+          <a:xfrm>
+            <a:off x="822960" y="5394960"/>
+            <a:ext cx="73152" cy="658368"/>
+          </a:xfrm>
+          <a:prstGeom prst="rect">
+            <a:avLst/>
+          </a:prstGeom>
+          <a:solidFill>
+            <a:srgbClr val="38BDF8"/>
+          </a:solidFill>
+          <a:ln w="12700">
+            <a:solidFill>
+              <a:srgbClr val="38BDF8">
+                <a:alpha val="0"/>
+              </a:srgbClr>
+            </a:solidFill>
+            <a:prstDash val="solid"/>
+          </a:ln>
+        </p:spPr>
+      </p:sp>
+      <p:sp>
+        <p:nvSpPr>
+          <p:cNvPr id="22" name="Shape 20"/>
+          <p:cNvSpPr/>
+          <p:nvPr/>
+        </p:nvSpPr>
+        <p:spPr>
+          <a:xfrm>
+            <a:off x="6272784" y="1389888"/>
+            <a:ext cx="73152" cy="658368"/>
+          </a:xfrm>
+          <a:prstGeom prst="rect">
+            <a:avLst/>
+          </a:prstGeom>
+          <a:solidFill>
+            <a:srgbClr val="F59E0B"/>
+          </a:solidFill>
+          <a:ln w="12700">
+            <a:solidFill>
+              <a:srgbClr val="F59E0B">
+                <a:alpha val="0"/>
+              </a:srgbClr>
+            </a:solidFill>
+            <a:prstDash val="solid"/>
+          </a:ln>
+        </p:spPr>
+      </p:sp>
+      <p:sp>
+        <p:nvSpPr>
+          <p:cNvPr id="23" name="Shape 21"/>
+          <p:cNvSpPr/>
+          <p:nvPr/>
+        </p:nvSpPr>
+        <p:spPr>
+          <a:xfrm>
+            <a:off x="6272784" y="2194560"/>
+            <a:ext cx="73152" cy="658368"/>
+          </a:xfrm>
+          <a:prstGeom prst="rect">
+            <a:avLst/>
+          </a:prstGeom>
+          <a:solidFill>
+            <a:srgbClr val="38BDF8"/>
+          </a:solidFill>
+          <a:ln w="12700">
+            <a:solidFill>
+              <a:srgbClr val="38BDF8">
+                <a:alpha val="0"/>
+              </a:srgbClr>
+            </a:solidFill>
+            <a:prstDash val="solid"/>
+          </a:ln>
+        </p:spPr>
+      </p:sp>
+      <p:sp>
+        <p:nvSpPr>
+          <p:cNvPr id="24" name="Shape 22"/>
+          <p:cNvSpPr/>
+          <p:nvPr/>
+        </p:nvSpPr>
+        <p:spPr>
+          <a:xfrm>
+            <a:off x="6272784" y="2990088"/>
+            <a:ext cx="73152" cy="658368"/>
+          </a:xfrm>
+          <a:prstGeom prst="rect">
+            <a:avLst/>
+          </a:prstGeom>
+          <a:solidFill>
+            <a:srgbClr val="F59E0B"/>
+          </a:solidFill>
+          <a:ln w="12700">
+            <a:solidFill>
+              <a:srgbClr val="F59E0B">
+                <a:alpha val="0"/>
+              </a:srgbClr>
+            </a:solidFill>
+            <a:prstDash val="solid"/>
+          </a:ln>
+        </p:spPr>
+      </p:sp>
+      <p:sp>
+        <p:nvSpPr>
+          <p:cNvPr id="25" name="Shape 23"/>
+          <p:cNvSpPr/>
+          <p:nvPr/>
+        </p:nvSpPr>
+        <p:spPr>
+          <a:xfrm>
+            <a:off x="6272784" y="3794760"/>
+            <a:ext cx="73152" cy="658368"/>
+          </a:xfrm>
+          <a:prstGeom prst="rect">
+            <a:avLst/>
+          </a:prstGeom>
+          <a:solidFill>
+            <a:srgbClr val="38BDF8"/>
+          </a:solidFill>
+          <a:ln w="12700">
+            <a:solidFill>
+              <a:srgbClr val="38BDF8">
+                <a:alpha val="0"/>
+              </a:srgbClr>
+            </a:solidFill>
+            <a:prstDash val="solid"/>
+          </a:ln>
+        </p:spPr>
+      </p:sp>
+      <p:sp>
+        <p:nvSpPr>
+          <p:cNvPr id="26" name="Shape 24"/>
+          <p:cNvSpPr/>
+          <p:nvPr/>
+        </p:nvSpPr>
+        <p:spPr>
+          <a:xfrm>
+            <a:off x="6272784" y="4599432"/>
+            <a:ext cx="73152" cy="658368"/>
+          </a:xfrm>
+          <a:prstGeom prst="rect">
+            <a:avLst/>
+          </a:prstGeom>
+          <a:solidFill>
+            <a:srgbClr val="F59E0B"/>
+          </a:solidFill>
+          <a:ln w="12700">
+            <a:solidFill>
+              <a:srgbClr val="F59E0B">
+                <a:alpha val="0"/>
+              </a:srgbClr>
+            </a:solidFill>
+            <a:prstDash val="solid"/>
+          </a:ln>
+        </p:spPr>
+      </p:sp>
+      <p:sp>
+        <p:nvSpPr>
+          <p:cNvPr id="27" name="Shape 25"/>
+          <p:cNvSpPr/>
+          <p:nvPr/>
+        </p:nvSpPr>
+        <p:spPr>
+          <a:xfrm>
+            <a:off x="6272784" y="5394960"/>
+            <a:ext cx="73152" cy="658368"/>
+          </a:xfrm>
+          <a:prstGeom prst="rect">
+            <a:avLst/>
+          </a:prstGeom>
+          <a:solidFill>
+            <a:srgbClr val="38BDF8"/>
+          </a:solidFill>
+          <a:ln w="12700">
+            <a:solidFill>
+              <a:srgbClr val="38BDF8">
+                <a:alpha val="0"/>
+              </a:srgbClr>
+            </a:solidFill>
+            <a:prstDash val="solid"/>
+          </a:ln>
+        </p:spPr>
+      </p:sp>
+      <p:sp>
+        <p:nvSpPr>
+          <p:cNvPr id="28" name="Text 26"/>
           <p:cNvSpPr txBox="1"/>
           <p:nvPr/>
         </p:nvSpPr>
@@ -13337,14 +13746,14 @@
       </p:sp>
       <p:sp>
         <p:nvSpPr>
-          <p:cNvPr id="15" name="Text 13"/>
+          <p:cNvPr id="29" name="Text 27"/>
           <p:cNvSpPr txBox="1"/>
           <p:nvPr/>
         </p:nvSpPr>
         <p:spPr>
           <a:xfrm>
-            <a:off x="987552" y="1572768"/>
-            <a:ext cx="10094976" cy="355092"/>
+            <a:off x="1042416" y="1481328"/>
+            <a:ext cx="4645152" cy="475488"/>
           </a:xfrm>
           <a:prstGeom prst="rect">
             <a:avLst/>
@@ -13356,14 +13765,14 @@
           <a:bodyPr wrap="square" lIns="0" tIns="25400" rIns="25400" bIns="0" rtlCol="0" anchor="ctr"/>
           <a:lstStyle/>
           <a:p>
-            <a:pPr algn="l" indent="0" marL="0">
+            <a:pPr algn="ctr" indent="0" marL="0">
               <a:lnSpc>
                 <a:spcPct val="120000"/>
               </a:lnSpc>
               <a:buNone/>
             </a:pPr>
             <a:r>
-              <a:rPr lang="en-US" sz="2200" dirty="0">
+              <a:rPr lang="en-US" sz="1800" dirty="0">
                 <a:solidFill>
                   <a:srgbClr val="F8FAFC"/>
                 </a:solidFill>
@@ -13371,22 +13780,22 @@
                 <a:ea typeface="Pretendard" pitchFamily="34" charset="-122"/>
                 <a:cs typeface="Pretendard" pitchFamily="34" charset="-120"/>
               </a:rPr>
-              <a:t>Preview Purpose</a:t>
+              <a:t>01  Preview Purpose</a:t>
             </a:r>
-            <a:endParaRPr lang="en-US" sz="2200" dirty="0"/>
+            <a:endParaRPr lang="en-US" sz="1800" dirty="0"/>
           </a:p>
         </p:txBody>
       </p:sp>
       <p:sp>
         <p:nvSpPr>
-          <p:cNvPr id="16" name="Text 14"/>
+          <p:cNvPr id="30" name="Text 28"/>
           <p:cNvSpPr txBox="1"/>
           <p:nvPr/>
         </p:nvSpPr>
         <p:spPr>
           <a:xfrm>
-            <a:off x="987552" y="1927860"/>
-            <a:ext cx="10094976" cy="355092"/>
+            <a:off x="1042416" y="2286000"/>
+            <a:ext cx="4645152" cy="475488"/>
           </a:xfrm>
           <a:prstGeom prst="rect">
             <a:avLst/>
@@ -13398,14 +13807,14 @@
           <a:bodyPr wrap="square" lIns="0" tIns="25400" rIns="25400" bIns="0" rtlCol="0" anchor="ctr"/>
           <a:lstStyle/>
           <a:p>
-            <a:pPr algn="l" indent="0" marL="0">
+            <a:pPr algn="ctr" indent="0" marL="0">
               <a:lnSpc>
                 <a:spcPct val="120000"/>
               </a:lnSpc>
               <a:buNone/>
             </a:pPr>
             <a:r>
-              <a:rPr lang="en-US" sz="2200" dirty="0">
+              <a:rPr lang="en-US" sz="1800" dirty="0">
                 <a:solidFill>
                   <a:srgbClr val="F8FAFC"/>
                 </a:solidFill>
@@ -13413,22 +13822,22 @@
                 <a:ea typeface="Pretendard" pitchFamily="34" charset="-122"/>
                 <a:cs typeface="Pretendard" pitchFamily="34" charset="-120"/>
               </a:rPr>
-              <a:t>Composition Contract</a:t>
+              <a:t>02  Composition Contract</a:t>
             </a:r>
-            <a:endParaRPr lang="en-US" sz="2200" dirty="0"/>
+            <a:endParaRPr lang="en-US" sz="1800" dirty="0"/>
           </a:p>
         </p:txBody>
       </p:sp>
       <p:sp>
         <p:nvSpPr>
-          <p:cNvPr id="17" name="Text 15"/>
+          <p:cNvPr id="31" name="Text 29"/>
           <p:cNvSpPr txBox="1"/>
           <p:nvPr/>
         </p:nvSpPr>
         <p:spPr>
           <a:xfrm>
-            <a:off x="987552" y="2282952"/>
-            <a:ext cx="10094976" cy="355092"/>
+            <a:off x="1042416" y="3081528"/>
+            <a:ext cx="4645152" cy="475488"/>
           </a:xfrm>
           <a:prstGeom prst="rect">
             <a:avLst/>
@@ -13440,14 +13849,14 @@
           <a:bodyPr wrap="square" lIns="0" tIns="25400" rIns="25400" bIns="0" rtlCol="0" anchor="ctr"/>
           <a:lstStyle/>
           <a:p>
-            <a:pPr algn="l" indent="0" marL="0">
+            <a:pPr algn="ctr" indent="0" marL="0">
               <a:lnSpc>
                 <a:spcPct val="120000"/>
               </a:lnSpc>
               <a:buNone/>
             </a:pPr>
             <a:r>
-              <a:rPr lang="en-US" sz="2200" dirty="0">
+              <a:rPr lang="en-US" sz="1800" dirty="0">
                 <a:solidFill>
                   <a:srgbClr val="F8FAFC"/>
                 </a:solidFill>
@@ -13455,22 +13864,22 @@
                 <a:ea typeface="Pretendard" pitchFamily="34" charset="-122"/>
                 <a:cs typeface="Pretendard" pitchFamily="34" charset="-120"/>
               </a:rPr>
-              <a:t>Style Families</a:t>
+              <a:t>03  Style Families</a:t>
             </a:r>
-            <a:endParaRPr lang="en-US" sz="2200" dirty="0"/>
+            <a:endParaRPr lang="en-US" sz="1800" dirty="0"/>
           </a:p>
         </p:txBody>
       </p:sp>
       <p:sp>
         <p:nvSpPr>
-          <p:cNvPr id="18" name="Text 16"/>
+          <p:cNvPr id="32" name="Text 30"/>
           <p:cNvSpPr txBox="1"/>
           <p:nvPr/>
         </p:nvSpPr>
         <p:spPr>
           <a:xfrm>
-            <a:off x="987552" y="2638044"/>
-            <a:ext cx="10094976" cy="355092"/>
+            <a:off x="1042416" y="3886200"/>
+            <a:ext cx="4645152" cy="475488"/>
           </a:xfrm>
           <a:prstGeom prst="rect">
             <a:avLst/>
@@ -13482,14 +13891,14 @@
           <a:bodyPr wrap="square" lIns="0" tIns="25400" rIns="25400" bIns="0" rtlCol="0" anchor="ctr"/>
           <a:lstStyle/>
           <a:p>
-            <a:pPr algn="l" indent="0" marL="0">
+            <a:pPr algn="ctr" indent="0" marL="0">
               <a:lnSpc>
                 <a:spcPct val="120000"/>
               </a:lnSpc>
               <a:buNone/>
             </a:pPr>
             <a:r>
-              <a:rPr lang="en-US" sz="2200" dirty="0">
+              <a:rPr lang="en-US" sz="1800" dirty="0">
                 <a:solidFill>
                   <a:srgbClr val="F8FAFC"/>
                 </a:solidFill>
@@ -13497,22 +13906,22 @@
                 <a:ea typeface="Pretendard" pitchFamily="34" charset="-122"/>
                 <a:cs typeface="Pretendard" pitchFamily="34" charset="-120"/>
               </a:rPr>
-              <a:t>Semantic Blocks</a:t>
+              <a:t>04  Semantic Blocks</a:t>
             </a:r>
-            <a:endParaRPr lang="en-US" sz="2200" dirty="0"/>
+            <a:endParaRPr lang="en-US" sz="1800" dirty="0"/>
           </a:p>
         </p:txBody>
       </p:sp>
       <p:sp>
         <p:nvSpPr>
-          <p:cNvPr id="19" name="Text 17"/>
+          <p:cNvPr id="33" name="Text 31"/>
           <p:cNvSpPr txBox="1"/>
           <p:nvPr/>
         </p:nvSpPr>
         <p:spPr>
           <a:xfrm>
-            <a:off x="987552" y="2993136"/>
-            <a:ext cx="10094976" cy="355092"/>
+            <a:off x="1042416" y="4690872"/>
+            <a:ext cx="4645152" cy="475488"/>
           </a:xfrm>
           <a:prstGeom prst="rect">
             <a:avLst/>
@@ -13524,14 +13933,14 @@
           <a:bodyPr wrap="square" lIns="0" tIns="25400" rIns="25400" bIns="0" rtlCol="0" anchor="ctr"/>
           <a:lstStyle/>
           <a:p>
-            <a:pPr algn="l" indent="0" marL="0">
+            <a:pPr algn="ctr" indent="0" marL="0">
               <a:lnSpc>
                 <a:spcPct val="120000"/>
               </a:lnSpc>
               <a:buNone/>
             </a:pPr>
             <a:r>
-              <a:rPr lang="en-US" sz="2200" dirty="0">
+              <a:rPr lang="en-US" sz="1800" dirty="0">
                 <a:solidFill>
                   <a:srgbClr val="F8FAFC"/>
                 </a:solidFill>
@@ -13539,22 +13948,22 @@
                 <a:ea typeface="Pretendard" pitchFamily="34" charset="-122"/>
                 <a:cs typeface="Pretendard" pitchFamily="34" charset="-120"/>
               </a:rPr>
-              <a:t>Pipeline Diagram</a:t>
+              <a:t>05  Pipeline Diagram</a:t>
             </a:r>
-            <a:endParaRPr lang="en-US" sz="2200" dirty="0"/>
+            <a:endParaRPr lang="en-US" sz="1800" dirty="0"/>
           </a:p>
         </p:txBody>
       </p:sp>
       <p:sp>
         <p:nvSpPr>
-          <p:cNvPr id="20" name="Text 18"/>
+          <p:cNvPr id="34" name="Text 32"/>
           <p:cNvSpPr txBox="1"/>
           <p:nvPr/>
         </p:nvSpPr>
         <p:spPr>
           <a:xfrm>
-            <a:off x="987552" y="3348228"/>
-            <a:ext cx="10094976" cy="355092"/>
+            <a:off x="1042416" y="5486400"/>
+            <a:ext cx="4645152" cy="475488"/>
           </a:xfrm>
           <a:prstGeom prst="rect">
             <a:avLst/>
@@ -13566,14 +13975,14 @@
           <a:bodyPr wrap="square" lIns="0" tIns="25400" rIns="25400" bIns="0" rtlCol="0" anchor="ctr"/>
           <a:lstStyle/>
           <a:p>
-            <a:pPr algn="l" indent="0" marL="0">
+            <a:pPr algn="ctr" indent="0" marL="0">
               <a:lnSpc>
                 <a:spcPct val="120000"/>
               </a:lnSpc>
               <a:buNone/>
             </a:pPr>
             <a:r>
-              <a:rPr lang="en-US" sz="2200" dirty="0">
+              <a:rPr lang="en-US" sz="1800" dirty="0">
                 <a:solidFill>
                   <a:srgbClr val="F8FAFC"/>
                 </a:solidFill>
@@ -13581,22 +13990,22 @@
                 <a:ea typeface="Pretendard" pitchFamily="34" charset="-122"/>
                 <a:cs typeface="Pretendard" pitchFamily="34" charset="-120"/>
               </a:rPr>
-              <a:t>Table Coherence</a:t>
+              <a:t>06  Table Coherence</a:t>
             </a:r>
-            <a:endParaRPr lang="en-US" sz="2200" dirty="0"/>
+            <a:endParaRPr lang="en-US" sz="1800" dirty="0"/>
           </a:p>
         </p:txBody>
       </p:sp>
       <p:sp>
         <p:nvSpPr>
-          <p:cNvPr id="21" name="Text 19"/>
+          <p:cNvPr id="35" name="Text 33"/>
           <p:cNvSpPr txBox="1"/>
           <p:nvPr/>
         </p:nvSpPr>
         <p:spPr>
           <a:xfrm>
-            <a:off x="987552" y="3703320"/>
-            <a:ext cx="10094976" cy="355092"/>
+            <a:off x="6492240" y="1481328"/>
+            <a:ext cx="4645152" cy="475488"/>
           </a:xfrm>
           <a:prstGeom prst="rect">
             <a:avLst/>
@@ -13608,14 +14017,14 @@
           <a:bodyPr wrap="square" lIns="0" tIns="25400" rIns="25400" bIns="0" rtlCol="0" anchor="ctr"/>
           <a:lstStyle/>
           <a:p>
-            <a:pPr algn="l" indent="0" marL="0">
+            <a:pPr algn="ctr" indent="0" marL="0">
               <a:lnSpc>
                 <a:spcPct val="120000"/>
               </a:lnSpc>
               <a:buNone/>
             </a:pPr>
             <a:r>
-              <a:rPr lang="en-US" sz="2200" dirty="0">
+              <a:rPr lang="en-US" sz="1800" dirty="0">
                 <a:solidFill>
                   <a:srgbClr val="F8FAFC"/>
                 </a:solidFill>
@@ -13623,22 +14032,22 @@
                 <a:ea typeface="Pretendard" pitchFamily="34" charset="-122"/>
                 <a:cs typeface="Pretendard" pitchFamily="34" charset="-120"/>
               </a:rPr>
-              <a:t>Chart and Table Pair</a:t>
+              <a:t>07  Chart and Table Pair</a:t>
             </a:r>
-            <a:endParaRPr lang="en-US" sz="2200" dirty="0"/>
+            <a:endParaRPr lang="en-US" sz="1800" dirty="0"/>
           </a:p>
         </p:txBody>
       </p:sp>
       <p:sp>
         <p:nvSpPr>
-          <p:cNvPr id="22" name="Text 20"/>
+          <p:cNvPr id="36" name="Text 34"/>
           <p:cNvSpPr txBox="1"/>
           <p:nvPr/>
         </p:nvSpPr>
         <p:spPr>
           <a:xfrm>
-            <a:off x="987552" y="4058412"/>
-            <a:ext cx="10094976" cy="355092"/>
+            <a:off x="6492240" y="2286000"/>
+            <a:ext cx="4645152" cy="475488"/>
           </a:xfrm>
           <a:prstGeom prst="rect">
             <a:avLst/>
@@ -13650,14 +14059,14 @@
           <a:bodyPr wrap="square" lIns="0" tIns="25400" rIns="25400" bIns="0" rtlCol="0" anchor="ctr"/>
           <a:lstStyle/>
           <a:p>
-            <a:pPr algn="l" indent="0" marL="0">
+            <a:pPr algn="ctr" indent="0" marL="0">
               <a:lnSpc>
                 <a:spcPct val="120000"/>
               </a:lnSpc>
               <a:buNone/>
             </a:pPr>
             <a:r>
-              <a:rPr lang="en-US" sz="2200" dirty="0">
+              <a:rPr lang="en-US" sz="1800" dirty="0">
                 <a:solidFill>
                   <a:srgbClr val="F8FAFC"/>
                 </a:solidFill>
@@ -13665,22 +14074,22 @@
                 <a:ea typeface="Pretendard" pitchFamily="34" charset="-122"/>
                 <a:cs typeface="Pretendard" pitchFamily="34" charset="-120"/>
               </a:rPr>
-              <a:t>Editable Proof Objects</a:t>
+              <a:t>08  Editable Proof Objects</a:t>
             </a:r>
-            <a:endParaRPr lang="en-US" sz="2200" dirty="0"/>
+            <a:endParaRPr lang="en-US" sz="1800" dirty="0"/>
           </a:p>
         </p:txBody>
       </p:sp>
       <p:sp>
         <p:nvSpPr>
-          <p:cNvPr id="23" name="Text 21"/>
+          <p:cNvPr id="37" name="Text 35"/>
           <p:cNvSpPr txBox="1"/>
           <p:nvPr/>
         </p:nvSpPr>
         <p:spPr>
           <a:xfrm>
-            <a:off x="987552" y="4413504"/>
-            <a:ext cx="10094976" cy="355092"/>
+            <a:off x="6492240" y="3081528"/>
+            <a:ext cx="4645152" cy="475488"/>
           </a:xfrm>
           <a:prstGeom prst="rect">
             <a:avLst/>
@@ -13692,14 +14101,14 @@
           <a:bodyPr wrap="square" lIns="0" tIns="25400" rIns="25400" bIns="0" rtlCol="0" anchor="ctr"/>
           <a:lstStyle/>
           <a:p>
-            <a:pPr algn="l" indent="0" marL="0">
+            <a:pPr algn="ctr" indent="0" marL="0">
               <a:lnSpc>
                 <a:spcPct val="120000"/>
               </a:lnSpc>
               <a:buNone/>
             </a:pPr>
             <a:r>
-              <a:rPr lang="en-US" sz="2200" dirty="0">
+              <a:rPr lang="en-US" sz="1800" dirty="0">
                 <a:solidFill>
                   <a:srgbClr val="F8FAFC"/>
                 </a:solidFill>
@@ -13707,22 +14116,22 @@
                 <a:ea typeface="Pretendard" pitchFamily="34" charset="-122"/>
                 <a:cs typeface="Pretendard" pitchFamily="34" charset="-120"/>
               </a:rPr>
-              <a:t>Object Shape Grammar</a:t>
+              <a:t>09  Object Shape Grammar</a:t>
             </a:r>
-            <a:endParaRPr lang="en-US" sz="2200" dirty="0"/>
+            <a:endParaRPr lang="en-US" sz="1800" dirty="0"/>
           </a:p>
         </p:txBody>
       </p:sp>
       <p:sp>
         <p:nvSpPr>
-          <p:cNvPr id="24" name="Text 22"/>
+          <p:cNvPr id="38" name="Text 36"/>
           <p:cNvSpPr txBox="1"/>
           <p:nvPr/>
         </p:nvSpPr>
         <p:spPr>
           <a:xfrm>
-            <a:off x="987552" y="4768596"/>
-            <a:ext cx="10094976" cy="355092"/>
+            <a:off x="6492240" y="3886200"/>
+            <a:ext cx="4645152" cy="475488"/>
           </a:xfrm>
           <a:prstGeom prst="rect">
             <a:avLst/>
@@ -13734,14 +14143,14 @@
           <a:bodyPr wrap="square" lIns="0" tIns="25400" rIns="25400" bIns="0" rtlCol="0" anchor="ctr"/>
           <a:lstStyle/>
           <a:p>
-            <a:pPr algn="l" indent="0" marL="0">
+            <a:pPr algn="ctr" indent="0" marL="0">
               <a:lnSpc>
                 <a:spcPct val="120000"/>
               </a:lnSpc>
               <a:buNone/>
             </a:pPr>
             <a:r>
-              <a:rPr lang="en-US" sz="2200" dirty="0">
+              <a:rPr lang="en-US" sz="1800" dirty="0">
                 <a:solidFill>
                   <a:srgbClr val="F8FAFC"/>
                 </a:solidFill>
@@ -13749,22 +14158,22 @@
                 <a:ea typeface="Pretendard" pitchFamily="34" charset="-122"/>
                 <a:cs typeface="Pretendard" pitchFamily="34" charset="-120"/>
               </a:rPr>
-              <a:t>Icon and Text Aside</a:t>
+              <a:t>10  Icon and Text Aside</a:t>
             </a:r>
-            <a:endParaRPr lang="en-US" sz="2200" dirty="0"/>
+            <a:endParaRPr lang="en-US" sz="1800" dirty="0"/>
           </a:p>
         </p:txBody>
       </p:sp>
       <p:sp>
         <p:nvSpPr>
-          <p:cNvPr id="25" name="Text 23"/>
+          <p:cNvPr id="39" name="Text 37"/>
           <p:cNvSpPr txBox="1"/>
           <p:nvPr/>
         </p:nvSpPr>
         <p:spPr>
           <a:xfrm>
-            <a:off x="987552" y="5123688"/>
-            <a:ext cx="10094976" cy="355092"/>
+            <a:off x="6492240" y="4690872"/>
+            <a:ext cx="4645152" cy="475488"/>
           </a:xfrm>
           <a:prstGeom prst="rect">
             <a:avLst/>
@@ -13776,14 +14185,14 @@
           <a:bodyPr wrap="square" lIns="0" tIns="25400" rIns="25400" bIns="0" rtlCol="0" anchor="ctr"/>
           <a:lstStyle/>
           <a:p>
-            <a:pPr algn="l" indent="0" marL="0">
+            <a:pPr algn="ctr" indent="0" marL="0">
               <a:lnSpc>
                 <a:spcPct val="120000"/>
               </a:lnSpc>
               <a:buNone/>
             </a:pPr>
             <a:r>
-              <a:rPr lang="en-US" sz="2200" dirty="0">
+              <a:rPr lang="en-US" sz="1800" dirty="0">
                 <a:solidFill>
                   <a:srgbClr val="F8FAFC"/>
                 </a:solidFill>
@@ -13791,22 +14200,22 @@
                 <a:ea typeface="Pretendard" pitchFamily="34" charset="-122"/>
                 <a:cs typeface="Pretendard" pitchFamily="34" charset="-120"/>
               </a:rPr>
-              <a:t>Overflow Guard</a:t>
+              <a:t>11  Overflow Guard</a:t>
             </a:r>
-            <a:endParaRPr lang="en-US" sz="2200" dirty="0"/>
+            <a:endParaRPr lang="en-US" sz="1800" dirty="0"/>
           </a:p>
         </p:txBody>
       </p:sp>
       <p:sp>
         <p:nvSpPr>
-          <p:cNvPr id="26" name="Text 24"/>
+          <p:cNvPr id="40" name="Text 38"/>
           <p:cNvSpPr txBox="1"/>
           <p:nvPr/>
         </p:nvSpPr>
         <p:spPr>
           <a:xfrm>
-            <a:off x="987552" y="5478780"/>
-            <a:ext cx="10094976" cy="355092"/>
+            <a:off x="6492240" y="5486400"/>
+            <a:ext cx="4645152" cy="475488"/>
           </a:xfrm>
           <a:prstGeom prst="rect">
             <a:avLst/>
@@ -13818,14 +14227,14 @@
           <a:bodyPr wrap="square" lIns="0" tIns="25400" rIns="25400" bIns="0" rtlCol="0" anchor="ctr"/>
           <a:lstStyle/>
           <a:p>
-            <a:pPr algn="l" indent="0" marL="0">
+            <a:pPr algn="ctr" indent="0" marL="0">
               <a:lnSpc>
                 <a:spcPct val="120000"/>
               </a:lnSpc>
               <a:buNone/>
             </a:pPr>
             <a:r>
-              <a:rPr lang="en-US" sz="2200" dirty="0">
+              <a:rPr lang="en-US" sz="1800" dirty="0">
                 <a:solidFill>
                   <a:srgbClr val="F8FAFC"/>
                 </a:solidFill>
@@ -13833,9 +14242,9 @@
                 <a:ea typeface="Pretendard" pitchFamily="34" charset="-122"/>
                 <a:cs typeface="Pretendard" pitchFamily="34" charset="-120"/>
               </a:rPr>
-              <a:t>Actions Output Review</a:t>
+              <a:t>12  Actions Output Review</a:t>
             </a:r>
-            <a:endParaRPr lang="en-US" sz="2200" dirty="0"/>
+            <a:endParaRPr lang="en-US" sz="1800" dirty="0"/>
           </a:p>
         </p:txBody>
       </p:sp>
@@ -14848,8 +15257,37 @@
         </p:nvSpPr>
         <p:spPr>
           <a:xfrm>
-            <a:off x="914400" y="1417320"/>
-            <a:ext cx="73152" cy="868680"/>
+            <a:off x="786384" y="1956816"/>
+            <a:ext cx="32004" cy="3483864"/>
+          </a:xfrm>
+          <a:prstGeom prst="rect">
+            <a:avLst/>
+          </a:prstGeom>
+          <a:solidFill>
+            <a:srgbClr val="38BDF8">
+              <a:alpha val="80000"/>
+            </a:srgbClr>
+          </a:solidFill>
+          <a:ln w="12700">
+            <a:solidFill>
+              <a:srgbClr val="38BDF8">
+                <a:alpha val="0"/>
+              </a:srgbClr>
+            </a:solidFill>
+            <a:prstDash val="solid"/>
+          </a:ln>
+        </p:spPr>
+      </p:sp>
+      <p:sp>
+        <p:nvSpPr>
+          <p:cNvPr id="14" name="Shape 12"/>
+          <p:cNvSpPr/>
+          <p:nvPr/>
+        </p:nvSpPr>
+        <p:spPr>
+          <a:xfrm>
+            <a:off x="914400" y="1865376"/>
+            <a:ext cx="73152" cy="1024128"/>
           </a:xfrm>
           <a:prstGeom prst="rect">
             <a:avLst/>
@@ -14869,14 +15307,14 @@
       </p:sp>
       <p:sp>
         <p:nvSpPr>
-          <p:cNvPr id="14" name="Shape 12"/>
-          <p:cNvSpPr/>
-          <p:nvPr/>
-        </p:nvSpPr>
-        <p:spPr>
-          <a:xfrm>
-            <a:off x="914400" y="2560320"/>
-            <a:ext cx="73152" cy="868680"/>
+          <p:cNvPr id="15" name="Shape 13"/>
+          <p:cNvSpPr/>
+          <p:nvPr/>
+        </p:nvSpPr>
+        <p:spPr>
+          <a:xfrm>
+            <a:off x="914400" y="3191256"/>
+            <a:ext cx="73152" cy="1024128"/>
           </a:xfrm>
           <a:prstGeom prst="rect">
             <a:avLst/>
@@ -14896,14 +15334,14 @@
       </p:sp>
       <p:sp>
         <p:nvSpPr>
-          <p:cNvPr id="15" name="Shape 13"/>
-          <p:cNvSpPr/>
-          <p:nvPr/>
-        </p:nvSpPr>
-        <p:spPr>
-          <a:xfrm>
-            <a:off x="914400" y="3703320"/>
-            <a:ext cx="73152" cy="868680"/>
+          <p:cNvPr id="16" name="Shape 14"/>
+          <p:cNvSpPr/>
+          <p:nvPr/>
+        </p:nvSpPr>
+        <p:spPr>
+          <a:xfrm>
+            <a:off x="914400" y="4507992"/>
+            <a:ext cx="73152" cy="1024128"/>
           </a:xfrm>
           <a:prstGeom prst="rect">
             <a:avLst/>
@@ -14923,7 +15361,7 @@
       </p:sp>
       <p:pic>
         <p:nvPicPr>
-          <p:cNvPr id="16" name="Image 0" descr="preencoded.png">    </p:cNvPr>
+          <p:cNvPr id="17" name="Image 0" descr="preencoded.png">    </p:cNvPr>
           <p:cNvPicPr>
             <a:picLocks noChangeAspect="1"/>
           </p:cNvPicPr>
@@ -14943,8 +15381,8 @@
         </p:blipFill>
         <p:spPr>
           <a:xfrm>
-            <a:off x="914400" y="1417320"/>
-            <a:ext cx="10241280" cy="868680"/>
+            <a:off x="914400" y="1865376"/>
+            <a:ext cx="10241280" cy="1024128"/>
           </a:xfrm>
           <a:prstGeom prst="rect">
             <a:avLst/>
@@ -14953,7 +15391,7 @@
       </p:pic>
       <p:pic>
         <p:nvPicPr>
-          <p:cNvPr id="17" name="Image 1" descr="preencoded.png">    </p:cNvPr>
+          <p:cNvPr id="18" name="Image 1" descr="preencoded.png">    </p:cNvPr>
           <p:cNvPicPr>
             <a:picLocks noChangeAspect="1"/>
           </p:cNvPicPr>
@@ -14973,8 +15411,8 @@
         </p:blipFill>
         <p:spPr>
           <a:xfrm>
-            <a:off x="914400" y="2560320"/>
-            <a:ext cx="10241280" cy="868680"/>
+            <a:off x="914400" y="3191256"/>
+            <a:ext cx="10241280" cy="1024128"/>
           </a:xfrm>
           <a:prstGeom prst="rect">
             <a:avLst/>
@@ -14983,7 +15421,7 @@
       </p:pic>
       <p:pic>
         <p:nvPicPr>
-          <p:cNvPr id="18" name="Image 2" descr="preencoded.png">    </p:cNvPr>
+          <p:cNvPr id="19" name="Image 2" descr="preencoded.png">    </p:cNvPr>
           <p:cNvPicPr>
             <a:picLocks noChangeAspect="1"/>
           </p:cNvPicPr>
@@ -15003,8 +15441,8 @@
         </p:blipFill>
         <p:spPr>
           <a:xfrm>
-            <a:off x="914400" y="3703320"/>
-            <a:ext cx="10241280" cy="868680"/>
+            <a:off x="914400" y="4507992"/>
+            <a:ext cx="10241280" cy="1024128"/>
           </a:xfrm>
           <a:prstGeom prst="rect">
             <a:avLst/>
@@ -15013,7 +15451,7 @@
       </p:pic>
       <p:sp>
         <p:nvSpPr>
-          <p:cNvPr id="19" name="Text 14"/>
+          <p:cNvPr id="20" name="Text 15"/>
           <p:cNvSpPr txBox="1"/>
           <p:nvPr/>
         </p:nvSpPr>
@@ -15055,18 +15493,18 @@
       </p:sp>
       <p:sp>
         <p:nvSpPr>
-          <p:cNvPr id="20" name="Shape 15"/>
-          <p:cNvSpPr/>
-          <p:nvPr/>
-        </p:nvSpPr>
-        <p:spPr>
-          <a:xfrm>
-            <a:off x="1097280" y="1623060"/>
-            <a:ext cx="457200" cy="457200"/>
+          <p:cNvPr id="21" name="Shape 16"/>
+          <p:cNvSpPr/>
+          <p:nvPr/>
+        </p:nvSpPr>
+        <p:spPr>
+          <a:xfrm>
+            <a:off x="1097280" y="2140428"/>
+            <a:ext cx="474025" cy="474025"/>
           </a:xfrm>
           <a:prstGeom prst="roundRect">
             <a:avLst>
-              <a:gd name="adj" fmla="val 8000"/>
+              <a:gd name="adj" fmla="val 7716"/>
             </a:avLst>
           </a:prstGeom>
           <a:solidFill>
@@ -15082,7 +15520,7 @@
       </p:sp>
       <p:pic>
         <p:nvPicPr>
-          <p:cNvPr id="21" name="Image 3" descr="flow icon from tabler-icons (MIT)">    </p:cNvPr>
+          <p:cNvPr id="22" name="Image 3" descr="flow icon from tabler-icons (MIT)">    </p:cNvPr>
           <p:cNvPicPr>
             <a:picLocks noChangeAspect="1"/>
           </p:cNvPicPr>
@@ -15102,8 +15540,8 @@
         </p:blipFill>
         <p:spPr>
           <a:xfrm>
-            <a:off x="1170432" y="1696212"/>
-            <a:ext cx="310896" cy="310896"/>
+            <a:off x="1170432" y="2213580"/>
+            <a:ext cx="327721" cy="327721"/>
           </a:xfrm>
           <a:prstGeom prst="rect">
             <a:avLst/>
@@ -15112,14 +15550,14 @@
       </p:pic>
       <p:sp>
         <p:nvSpPr>
-          <p:cNvPr id="22" name="Text 16"/>
+          <p:cNvPr id="23" name="Text 17"/>
           <p:cNvSpPr txBox="1"/>
           <p:nvPr/>
         </p:nvSpPr>
         <p:spPr>
           <a:xfrm>
-            <a:off x="1682496" y="1508760"/>
-            <a:ext cx="9272016" cy="685800"/>
+            <a:off x="1699321" y="1957548"/>
+            <a:ext cx="9255191" cy="839785"/>
           </a:xfrm>
           <a:prstGeom prst="rect">
             <a:avLst/>
@@ -15171,18 +15609,18 @@
       </p:sp>
       <p:sp>
         <p:nvSpPr>
-          <p:cNvPr id="23" name="Shape 17"/>
-          <p:cNvSpPr/>
-          <p:nvPr/>
-        </p:nvSpPr>
-        <p:spPr>
-          <a:xfrm>
-            <a:off x="1097280" y="2766060"/>
-            <a:ext cx="457200" cy="457200"/>
+          <p:cNvPr id="24" name="Shape 18"/>
+          <p:cNvSpPr/>
+          <p:nvPr/>
+        </p:nvSpPr>
+        <p:spPr>
+          <a:xfrm>
+            <a:off x="1097280" y="3466308"/>
+            <a:ext cx="474025" cy="474025"/>
           </a:xfrm>
           <a:prstGeom prst="roundRect">
             <a:avLst>
-              <a:gd name="adj" fmla="val 8000"/>
+              <a:gd name="adj" fmla="val 7716"/>
             </a:avLst>
           </a:prstGeom>
           <a:solidFill>
@@ -15198,7 +15636,7 @@
       </p:sp>
       <p:pic>
         <p:nvPicPr>
-          <p:cNvPr id="24" name="Image 4" descr="verified icon from tabler-icons (MIT)">    </p:cNvPr>
+          <p:cNvPr id="25" name="Image 4" descr="verified icon from tabler-icons (MIT)">    </p:cNvPr>
           <p:cNvPicPr>
             <a:picLocks noChangeAspect="1"/>
           </p:cNvPicPr>
@@ -15218,8 +15656,8 @@
         </p:blipFill>
         <p:spPr>
           <a:xfrm>
-            <a:off x="1170432" y="2839212"/>
-            <a:ext cx="310896" cy="310896"/>
+            <a:off x="1170432" y="3539460"/>
+            <a:ext cx="327721" cy="327721"/>
           </a:xfrm>
           <a:prstGeom prst="rect">
             <a:avLst/>
@@ -15228,14 +15666,14 @@
       </p:pic>
       <p:sp>
         <p:nvSpPr>
-          <p:cNvPr id="25" name="Text 18"/>
+          <p:cNvPr id="26" name="Text 19"/>
           <p:cNvSpPr txBox="1"/>
           <p:nvPr/>
         </p:nvSpPr>
         <p:spPr>
           <a:xfrm>
-            <a:off x="1682496" y="2651760"/>
-            <a:ext cx="9272016" cy="685800"/>
+            <a:off x="1699321" y="3283428"/>
+            <a:ext cx="9255191" cy="839785"/>
           </a:xfrm>
           <a:prstGeom prst="rect">
             <a:avLst/>
@@ -15287,18 +15725,18 @@
       </p:sp>
       <p:sp>
         <p:nvSpPr>
-          <p:cNvPr id="26" name="Shape 19"/>
-          <p:cNvSpPr/>
-          <p:nvPr/>
-        </p:nvSpPr>
-        <p:spPr>
-          <a:xfrm>
-            <a:off x="1097280" y="3909060"/>
-            <a:ext cx="457200" cy="457200"/>
+          <p:cNvPr id="27" name="Shape 20"/>
+          <p:cNvSpPr/>
+          <p:nvPr/>
+        </p:nvSpPr>
+        <p:spPr>
+          <a:xfrm>
+            <a:off x="1097280" y="4783044"/>
+            <a:ext cx="474025" cy="474025"/>
           </a:xfrm>
           <a:prstGeom prst="roundRect">
             <a:avLst>
-              <a:gd name="adj" fmla="val 8000"/>
+              <a:gd name="adj" fmla="val 7716"/>
             </a:avLst>
           </a:prstGeom>
           <a:solidFill>
@@ -15314,7 +15752,7 @@
       </p:sp>
       <p:pic>
         <p:nvPicPr>
-          <p:cNvPr id="27" name="Image 5" descr="spark icon from tabler-icons (MIT)">    </p:cNvPr>
+          <p:cNvPr id="28" name="Image 5" descr="spark icon from tabler-icons (MIT)">    </p:cNvPr>
           <p:cNvPicPr>
             <a:picLocks noChangeAspect="1"/>
           </p:cNvPicPr>
@@ -15334,8 +15772,8 @@
         </p:blipFill>
         <p:spPr>
           <a:xfrm>
-            <a:off x="1170432" y="3982212"/>
-            <a:ext cx="310896" cy="310896"/>
+            <a:off x="1170432" y="4856196"/>
+            <a:ext cx="327721" cy="327721"/>
           </a:xfrm>
           <a:prstGeom prst="rect">
             <a:avLst/>
@@ -15344,14 +15782,14 @@
       </p:pic>
       <p:sp>
         <p:nvSpPr>
-          <p:cNvPr id="28" name="Text 20"/>
+          <p:cNvPr id="29" name="Text 21"/>
           <p:cNvSpPr txBox="1"/>
           <p:nvPr/>
         </p:nvSpPr>
         <p:spPr>
           <a:xfrm>
-            <a:off x="1682496" y="3794760"/>
-            <a:ext cx="9272016" cy="685800"/>
+            <a:off x="1699321" y="4600164"/>
+            <a:ext cx="9255191" cy="839785"/>
           </a:xfrm>
           <a:prstGeom prst="rect">
             <a:avLst/>
@@ -16315,8 +16753,37 @@
         </p:nvSpPr>
         <p:spPr>
           <a:xfrm>
-            <a:off x="914400" y="1417320"/>
-            <a:ext cx="73152" cy="868680"/>
+            <a:off x="786384" y="1956816"/>
+            <a:ext cx="32004" cy="3483864"/>
+          </a:xfrm>
+          <a:prstGeom prst="rect">
+            <a:avLst/>
+          </a:prstGeom>
+          <a:solidFill>
+            <a:srgbClr val="38BDF8">
+              <a:alpha val="80000"/>
+            </a:srgbClr>
+          </a:solidFill>
+          <a:ln w="12700">
+            <a:solidFill>
+              <a:srgbClr val="38BDF8">
+                <a:alpha val="0"/>
+              </a:srgbClr>
+            </a:solidFill>
+            <a:prstDash val="solid"/>
+          </a:ln>
+        </p:spPr>
+      </p:sp>
+      <p:sp>
+        <p:nvSpPr>
+          <p:cNvPr id="14" name="Shape 12"/>
+          <p:cNvSpPr/>
+          <p:nvPr/>
+        </p:nvSpPr>
+        <p:spPr>
+          <a:xfrm>
+            <a:off x="914400" y="1865376"/>
+            <a:ext cx="73152" cy="1024128"/>
           </a:xfrm>
           <a:prstGeom prst="rect">
             <a:avLst/>
@@ -16336,14 +16803,14 @@
       </p:sp>
       <p:sp>
         <p:nvSpPr>
-          <p:cNvPr id="14" name="Shape 12"/>
-          <p:cNvSpPr/>
-          <p:nvPr/>
-        </p:nvSpPr>
-        <p:spPr>
-          <a:xfrm>
-            <a:off x="914400" y="2560320"/>
-            <a:ext cx="73152" cy="868680"/>
+          <p:cNvPr id="15" name="Shape 13"/>
+          <p:cNvSpPr/>
+          <p:nvPr/>
+        </p:nvSpPr>
+        <p:spPr>
+          <a:xfrm>
+            <a:off x="914400" y="3191256"/>
+            <a:ext cx="73152" cy="1024128"/>
           </a:xfrm>
           <a:prstGeom prst="rect">
             <a:avLst/>
@@ -16363,14 +16830,14 @@
       </p:sp>
       <p:sp>
         <p:nvSpPr>
-          <p:cNvPr id="15" name="Shape 13"/>
-          <p:cNvSpPr/>
-          <p:nvPr/>
-        </p:nvSpPr>
-        <p:spPr>
-          <a:xfrm>
-            <a:off x="914400" y="3703320"/>
-            <a:ext cx="73152" cy="868680"/>
+          <p:cNvPr id="16" name="Shape 14"/>
+          <p:cNvSpPr/>
+          <p:nvPr/>
+        </p:nvSpPr>
+        <p:spPr>
+          <a:xfrm>
+            <a:off x="914400" y="4507992"/>
+            <a:ext cx="73152" cy="1024128"/>
           </a:xfrm>
           <a:prstGeom prst="rect">
             <a:avLst/>
@@ -16390,7 +16857,7 @@
       </p:sp>
       <p:pic>
         <p:nvPicPr>
-          <p:cNvPr id="16" name="Image 0" descr="preencoded.png">    </p:cNvPr>
+          <p:cNvPr id="17" name="Image 0" descr="preencoded.png">    </p:cNvPr>
           <p:cNvPicPr>
             <a:picLocks noChangeAspect="1"/>
           </p:cNvPicPr>
@@ -16410,8 +16877,8 @@
         </p:blipFill>
         <p:spPr>
           <a:xfrm>
-            <a:off x="914400" y="1417320"/>
-            <a:ext cx="10241280" cy="868680"/>
+            <a:off x="914400" y="1865376"/>
+            <a:ext cx="10241280" cy="1024128"/>
           </a:xfrm>
           <a:prstGeom prst="rect">
             <a:avLst/>
@@ -16420,7 +16887,7 @@
       </p:pic>
       <p:pic>
         <p:nvPicPr>
-          <p:cNvPr id="17" name="Image 1" descr="preencoded.png">    </p:cNvPr>
+          <p:cNvPr id="18" name="Image 1" descr="preencoded.png">    </p:cNvPr>
           <p:cNvPicPr>
             <a:picLocks noChangeAspect="1"/>
           </p:cNvPicPr>
@@ -16440,8 +16907,8 @@
         </p:blipFill>
         <p:spPr>
           <a:xfrm>
-            <a:off x="914400" y="2560320"/>
-            <a:ext cx="10241280" cy="868680"/>
+            <a:off x="914400" y="3191256"/>
+            <a:ext cx="10241280" cy="1024128"/>
           </a:xfrm>
           <a:prstGeom prst="rect">
             <a:avLst/>
@@ -16450,7 +16917,7 @@
       </p:pic>
       <p:pic>
         <p:nvPicPr>
-          <p:cNvPr id="18" name="Image 2" descr="preencoded.png">    </p:cNvPr>
+          <p:cNvPr id="19" name="Image 2" descr="preencoded.png">    </p:cNvPr>
           <p:cNvPicPr>
             <a:picLocks noChangeAspect="1"/>
           </p:cNvPicPr>
@@ -16470,8 +16937,8 @@
         </p:blipFill>
         <p:spPr>
           <a:xfrm>
-            <a:off x="914400" y="3703320"/>
-            <a:ext cx="10241280" cy="868680"/>
+            <a:off x="914400" y="4507992"/>
+            <a:ext cx="10241280" cy="1024128"/>
           </a:xfrm>
           <a:prstGeom prst="rect">
             <a:avLst/>
@@ -16480,7 +16947,7 @@
       </p:pic>
       <p:sp>
         <p:nvSpPr>
-          <p:cNvPr id="19" name="Text 14"/>
+          <p:cNvPr id="20" name="Text 15"/>
           <p:cNvSpPr txBox="1"/>
           <p:nvPr/>
         </p:nvSpPr>
@@ -16522,18 +16989,18 @@
       </p:sp>
       <p:sp>
         <p:nvSpPr>
-          <p:cNvPr id="20" name="Shape 15"/>
-          <p:cNvSpPr/>
-          <p:nvPr/>
-        </p:nvSpPr>
-        <p:spPr>
-          <a:xfrm>
-            <a:off x="1097280" y="1623060"/>
-            <a:ext cx="457200" cy="457200"/>
+          <p:cNvPr id="21" name="Shape 16"/>
+          <p:cNvSpPr/>
+          <p:nvPr/>
+        </p:nvSpPr>
+        <p:spPr>
+          <a:xfrm>
+            <a:off x="1097280" y="2140428"/>
+            <a:ext cx="474025" cy="474025"/>
           </a:xfrm>
           <a:prstGeom prst="roundRect">
             <a:avLst>
-              <a:gd name="adj" fmla="val 8000"/>
+              <a:gd name="adj" fmla="val 7716"/>
             </a:avLst>
           </a:prstGeom>
           <a:solidFill>
@@ -16549,7 +17016,7 @@
       </p:sp>
       <p:pic>
         <p:nvPicPr>
-          <p:cNvPr id="21" name="Image 3" descr="flow icon from tabler-icons (MIT)">    </p:cNvPr>
+          <p:cNvPr id="22" name="Image 3" descr="flow icon from tabler-icons (MIT)">    </p:cNvPr>
           <p:cNvPicPr>
             <a:picLocks noChangeAspect="1"/>
           </p:cNvPicPr>
@@ -16569,8 +17036,8 @@
         </p:blipFill>
         <p:spPr>
           <a:xfrm>
-            <a:off x="1170432" y="1696212"/>
-            <a:ext cx="310896" cy="310896"/>
+            <a:off x="1170432" y="2213580"/>
+            <a:ext cx="327721" cy="327721"/>
           </a:xfrm>
           <a:prstGeom prst="rect">
             <a:avLst/>
@@ -16579,14 +17046,14 @@
       </p:pic>
       <p:sp>
         <p:nvSpPr>
-          <p:cNvPr id="22" name="Text 16"/>
+          <p:cNvPr id="23" name="Text 17"/>
           <p:cNvSpPr txBox="1"/>
           <p:nvPr/>
         </p:nvSpPr>
         <p:spPr>
           <a:xfrm>
-            <a:off x="1682496" y="1508760"/>
-            <a:ext cx="9272016" cy="685800"/>
+            <a:off x="1699321" y="1957548"/>
+            <a:ext cx="9255191" cy="839785"/>
           </a:xfrm>
           <a:prstGeom prst="rect">
             <a:avLst/>
@@ -16613,7 +17080,7 @@
                 <a:ea typeface="Pretendard" pitchFamily="34" charset="-122"/>
                 <a:cs typeface="Pretendard" pitchFamily="34" charset="-120"/>
               </a:rPr>
-              <a:t>Plain / clean</a:t>
+              <a:t>Clean / minimalism</a:t>
             </a:r>
             <a:pPr algn="l" indent="0" marL="0">
               <a:lnSpc>
@@ -16630,7 +17097,7 @@
                 <a:ea typeface="Pretendard" pitchFamily="34" charset="-122"/>
                 <a:cs typeface="Pretendard" pitchFamily="34" charset="-120"/>
               </a:rPr>
-              <a:t>  low-decoration baselines.</a:t>
+              <a:t>  restrained structural baselines.</a:t>
             </a:r>
             <a:endParaRPr lang="en-US" sz="2200" dirty="0"/>
           </a:p>
@@ -16638,18 +17105,18 @@
       </p:sp>
       <p:sp>
         <p:nvSpPr>
-          <p:cNvPr id="23" name="Shape 17"/>
-          <p:cNvSpPr/>
-          <p:nvPr/>
-        </p:nvSpPr>
-        <p:spPr>
-          <a:xfrm>
-            <a:off x="1097280" y="2766060"/>
-            <a:ext cx="457200" cy="457200"/>
+          <p:cNvPr id="24" name="Shape 18"/>
+          <p:cNvSpPr/>
+          <p:nvPr/>
+        </p:nvSpPr>
+        <p:spPr>
+          <a:xfrm>
+            <a:off x="1097280" y="3466308"/>
+            <a:ext cx="474025" cy="474025"/>
           </a:xfrm>
           <a:prstGeom prst="roundRect">
             <a:avLst>
-              <a:gd name="adj" fmla="val 8000"/>
+              <a:gd name="adj" fmla="val 7716"/>
             </a:avLst>
           </a:prstGeom>
           <a:solidFill>
@@ -16665,7 +17132,7 @@
       </p:sp>
       <p:pic>
         <p:nvPicPr>
-          <p:cNvPr id="24" name="Image 4" descr="verified icon from tabler-icons (MIT)">    </p:cNvPr>
+          <p:cNvPr id="25" name="Image 4" descr="verified icon from tabler-icons (MIT)">    </p:cNvPr>
           <p:cNvPicPr>
             <a:picLocks noChangeAspect="1"/>
           </p:cNvPicPr>
@@ -16685,8 +17152,8 @@
         </p:blipFill>
         <p:spPr>
           <a:xfrm>
-            <a:off x="1170432" y="2839212"/>
-            <a:ext cx="310896" cy="310896"/>
+            <a:off x="1170432" y="3539460"/>
+            <a:ext cx="327721" cy="327721"/>
           </a:xfrm>
           <a:prstGeom prst="rect">
             <a:avLst/>
@@ -16695,14 +17162,14 @@
       </p:pic>
       <p:sp>
         <p:nvSpPr>
-          <p:cNvPr id="25" name="Text 18"/>
+          <p:cNvPr id="26" name="Text 19"/>
           <p:cNvSpPr txBox="1"/>
           <p:nvPr/>
         </p:nvSpPr>
         <p:spPr>
           <a:xfrm>
-            <a:off x="1682496" y="2651760"/>
-            <a:ext cx="9272016" cy="685800"/>
+            <a:off x="1699321" y="3283428"/>
+            <a:ext cx="9255191" cy="839785"/>
           </a:xfrm>
           <a:prstGeom prst="rect">
             <a:avLst/>
@@ -16754,18 +17221,18 @@
       </p:sp>
       <p:sp>
         <p:nvSpPr>
-          <p:cNvPr id="26" name="Shape 19"/>
-          <p:cNvSpPr/>
-          <p:nvPr/>
-        </p:nvSpPr>
-        <p:spPr>
-          <a:xfrm>
-            <a:off x="1097280" y="3909060"/>
-            <a:ext cx="457200" cy="457200"/>
+          <p:cNvPr id="27" name="Shape 20"/>
+          <p:cNvSpPr/>
+          <p:nvPr/>
+        </p:nvSpPr>
+        <p:spPr>
+          <a:xfrm>
+            <a:off x="1097280" y="4783044"/>
+            <a:ext cx="474025" cy="474025"/>
           </a:xfrm>
           <a:prstGeom prst="roundRect">
             <a:avLst>
-              <a:gd name="adj" fmla="val 8000"/>
+              <a:gd name="adj" fmla="val 7716"/>
             </a:avLst>
           </a:prstGeom>
           <a:solidFill>
@@ -16781,7 +17248,7 @@
       </p:sp>
       <p:pic>
         <p:nvPicPr>
-          <p:cNvPr id="27" name="Image 5" descr="spark icon from tabler-icons (MIT)">    </p:cNvPr>
+          <p:cNvPr id="28" name="Image 5" descr="spark icon from tabler-icons (MIT)">    </p:cNvPr>
           <p:cNvPicPr>
             <a:picLocks noChangeAspect="1"/>
           </p:cNvPicPr>
@@ -16801,8 +17268,8 @@
         </p:blipFill>
         <p:spPr>
           <a:xfrm>
-            <a:off x="1170432" y="3982212"/>
-            <a:ext cx="310896" cy="310896"/>
+            <a:off x="1170432" y="4856196"/>
+            <a:ext cx="327721" cy="327721"/>
           </a:xfrm>
           <a:prstGeom prst="rect">
             <a:avLst/>
@@ -16811,14 +17278,14 @@
       </p:pic>
       <p:sp>
         <p:nvSpPr>
-          <p:cNvPr id="28" name="Text 20"/>
+          <p:cNvPr id="29" name="Text 21"/>
           <p:cNvSpPr txBox="1"/>
           <p:nvPr/>
         </p:nvSpPr>
         <p:spPr>
           <a:xfrm>
-            <a:off x="1682496" y="3794760"/>
-            <a:ext cx="9272016" cy="685800"/>
+            <a:off x="1699321" y="4600164"/>
+            <a:ext cx="9255191" cy="839785"/>
           </a:xfrm>
           <a:prstGeom prst="rect">
             <a:avLst/>

--- a/docs/theme-preview/pptx/data.pptx
+++ b/docs/theme-preview/pptx/data.pptx
@@ -10498,7 +10498,7 @@
       </p:sp>
       <p:pic>
         <p:nvPicPr>
-          <p:cNvPr id="23" name="Image 4" descr="flow icon from tabler-icons (MIT)">    </p:cNvPr>
+          <p:cNvPr id="23" name="Image 4" descr="article icon from tabler-icons (MIT)">    </p:cNvPr>
           <p:cNvPicPr>
             <a:picLocks noChangeAspect="1"/>
           </p:cNvPicPr>
@@ -10614,7 +10614,7 @@
       </p:sp>
       <p:pic>
         <p:nvPicPr>
-          <p:cNvPr id="26" name="Image 5" descr="verified icon from tabler-icons (MIT)">    </p:cNvPr>
+          <p:cNvPr id="26" name="Image 5" descr="article icon from tabler-icons (MIT)">    </p:cNvPr>
           <p:cNvPicPr>
             <a:picLocks noChangeAspect="1"/>
           </p:cNvPicPr>
@@ -10730,7 +10730,7 @@
       </p:sp>
       <p:pic>
         <p:nvPicPr>
-          <p:cNvPr id="29" name="Image 6" descr="spark icon from tabler-icons (MIT)">    </p:cNvPr>
+          <p:cNvPr id="29" name="Image 6" descr="article icon from tabler-icons (MIT)">    </p:cNvPr>
           <p:cNvPicPr>
             <a:picLocks noChangeAspect="1"/>
           </p:cNvPicPr>
@@ -10846,7 +10846,7 @@
       </p:sp>
       <p:pic>
         <p:nvPicPr>
-          <p:cNvPr id="32" name="Image 7" descr="chart icon from tabler-icons (MIT)">    </p:cNvPr>
+          <p:cNvPr id="32" name="Image 7" descr="table icon from tabler-icons (MIT)">    </p:cNvPr>
           <p:cNvPicPr>
             <a:picLocks noChangeAspect="1"/>
           </p:cNvPicPr>
@@ -11578,7 +11578,7 @@
       </p:sp>
       <p:pic>
         <p:nvPicPr>
-          <p:cNvPr id="23" name="Image 4" descr="flow icon from tabler-icons (MIT)">    </p:cNvPr>
+          <p:cNvPr id="23" name="Image 4" descr="verified icon from tabler-icons (MIT)">    </p:cNvPr>
           <p:cNvPicPr>
             <a:picLocks noChangeAspect="1"/>
           </p:cNvPicPr>
@@ -11694,7 +11694,7 @@
       </p:sp>
       <p:pic>
         <p:nvPicPr>
-          <p:cNvPr id="26" name="Image 5" descr="verified icon from tabler-icons (MIT)">    </p:cNvPr>
+          <p:cNvPr id="26" name="Image 5" descr="table icon from tabler-icons (MIT)">    </p:cNvPr>
           <p:cNvPicPr>
             <a:picLocks noChangeAspect="1"/>
           </p:cNvPicPr>
@@ -11810,7 +11810,7 @@
       </p:sp>
       <p:pic>
         <p:nvPicPr>
-          <p:cNvPr id="29" name="Image 6" descr="spark icon from tabler-icons (MIT)">    </p:cNvPr>
+          <p:cNvPr id="29" name="Image 6" descr="article icon from tabler-icons (MIT)">    </p:cNvPr>
           <p:cNvPicPr>
             <a:picLocks noChangeAspect="1"/>
           </p:cNvPicPr>
@@ -11926,7 +11926,7 @@
       </p:sp>
       <p:pic>
         <p:nvPicPr>
-          <p:cNvPr id="32" name="Image 7" descr="chart icon from tabler-icons (MIT)">    </p:cNvPr>
+          <p:cNvPr id="32" name="Image 7" descr="article icon from tabler-icons (MIT)">    </p:cNvPr>
           <p:cNvPicPr>
             <a:picLocks noChangeAspect="1"/>
           </p:cNvPicPr>
@@ -15520,7 +15520,7 @@
       </p:sp>
       <p:pic>
         <p:nvPicPr>
-          <p:cNvPr id="22" name="Image 3" descr="flow icon from tabler-icons (MIT)">    </p:cNvPr>
+          <p:cNvPr id="22" name="Image 3" descr="article icon from tabler-icons (MIT)">    </p:cNvPr>
           <p:cNvPicPr>
             <a:picLocks noChangeAspect="1"/>
           </p:cNvPicPr>
@@ -15636,7 +15636,7 @@
       </p:sp>
       <p:pic>
         <p:nvPicPr>
-          <p:cNvPr id="25" name="Image 4" descr="verified icon from tabler-icons (MIT)">    </p:cNvPr>
+          <p:cNvPr id="25" name="Image 4" descr="chart icon from tabler-icons (MIT)">    </p:cNvPr>
           <p:cNvPicPr>
             <a:picLocks noChangeAspect="1"/>
           </p:cNvPicPr>
@@ -15752,7 +15752,7 @@
       </p:sp>
       <p:pic>
         <p:nvPicPr>
-          <p:cNvPr id="28" name="Image 5" descr="spark icon from tabler-icons (MIT)">    </p:cNvPr>
+          <p:cNvPr id="28" name="Image 5" descr="article icon from tabler-icons (MIT)">    </p:cNvPr>
           <p:cNvPicPr>
             <a:picLocks noChangeAspect="1"/>
           </p:cNvPicPr>
@@ -17016,7 +17016,7 @@
       </p:sp>
       <p:pic>
         <p:nvPicPr>
-          <p:cNvPr id="22" name="Image 3" descr="flow icon from tabler-icons (MIT)">    </p:cNvPr>
+          <p:cNvPr id="22" name="Image 3" descr="article icon from tabler-icons (MIT)">    </p:cNvPr>
           <p:cNvPicPr>
             <a:picLocks noChangeAspect="1"/>
           </p:cNvPicPr>
@@ -17132,7 +17132,7 @@
       </p:sp>
       <p:pic>
         <p:nvPicPr>
-          <p:cNvPr id="25" name="Image 4" descr="verified icon from tabler-icons (MIT)">    </p:cNvPr>
+          <p:cNvPr id="25" name="Image 4" descr="article icon from tabler-icons (MIT)">    </p:cNvPr>
           <p:cNvPicPr>
             <a:picLocks noChangeAspect="1"/>
           </p:cNvPicPr>
@@ -17248,7 +17248,7 @@
       </p:sp>
       <p:pic>
         <p:nvPicPr>
-          <p:cNvPr id="28" name="Image 5" descr="spark icon from tabler-icons (MIT)">    </p:cNvPr>
+          <p:cNvPr id="28" name="Image 5" descr="article icon from tabler-icons (MIT)">    </p:cNvPr>
           <p:cNvPicPr>
             <a:picLocks noChangeAspect="1"/>
           </p:cNvPicPr>
@@ -18540,7 +18540,7 @@
       </p:sp>
       <p:pic>
         <p:nvPicPr>
-          <p:cNvPr id="23" name="Image 4" descr="flow icon from tabler-icons (MIT)">    </p:cNvPr>
+          <p:cNvPr id="23" name="Image 4" descr="table icon from tabler-icons (MIT)">    </p:cNvPr>
           <p:cNvPicPr>
             <a:picLocks noChangeAspect="1"/>
           </p:cNvPicPr>
@@ -18656,7 +18656,7 @@
       </p:sp>
       <p:pic>
         <p:nvPicPr>
-          <p:cNvPr id="26" name="Image 5" descr="verified icon from tabler-icons (MIT)">    </p:cNvPr>
+          <p:cNvPr id="26" name="Image 5" descr="article icon from tabler-icons (MIT)">    </p:cNvPr>
           <p:cNvPicPr>
             <a:picLocks noChangeAspect="1"/>
           </p:cNvPicPr>
@@ -18772,7 +18772,7 @@
       </p:sp>
       <p:pic>
         <p:nvPicPr>
-          <p:cNvPr id="29" name="Image 6" descr="spark icon from tabler-icons (MIT)">    </p:cNvPr>
+          <p:cNvPr id="29" name="Image 6" descr="article icon from tabler-icons (MIT)">    </p:cNvPr>
           <p:cNvPicPr>
             <a:picLocks noChangeAspect="1"/>
           </p:cNvPicPr>
@@ -18888,7 +18888,7 @@
       </p:sp>
       <p:pic>
         <p:nvPicPr>
-          <p:cNvPr id="32" name="Image 7" descr="chart icon from tabler-icons (MIT)">    </p:cNvPr>
+          <p:cNvPr id="32" name="Image 7" descr="table icon from tabler-icons (MIT)">    </p:cNvPr>
           <p:cNvPicPr>
             <a:picLocks noChangeAspect="1"/>
           </p:cNvPicPr>

--- a/docs/theme-preview/pptx/data.pptx
+++ b/docs/theme-preview/pptx/data.pptx
@@ -13738,7 +13738,7 @@
                 <a:ea typeface="Pretendard" pitchFamily="34" charset="-122"/>
                 <a:cs typeface="Pretendard" pitchFamily="34" charset="-120"/>
               </a:rPr>
-              <a:t>목차</a:t>
+              <a:t>Agenda</a:t>
             </a:r>
             <a:endParaRPr lang="en-US" sz="3800" dirty="0"/>
           </a:p>

--- a/docs/theme-preview/pptx/data.pptx
+++ b/docs/theme-preview/pptx/data.pptx
@@ -3578,36 +3578,39 @@
           </a:ln>
         </p:spPr>
       </p:sp>
-      <p:sp>
-        <p:nvSpPr>
-          <p:cNvPr id="13" name="Shape 11"/>
-          <p:cNvSpPr/>
-          <p:nvPr/>
-        </p:nvSpPr>
-        <p:spPr>
-          <a:xfrm>
-            <a:off x="914400" y="1463040"/>
-            <a:ext cx="10241280" cy="73152"/>
-          </a:xfrm>
-          <a:prstGeom prst="rect">
-            <a:avLst/>
-          </a:prstGeom>
-          <a:solidFill>
-            <a:srgbClr val="F59E0B"/>
-          </a:solidFill>
-          <a:ln w="12700">
-            <a:solidFill>
-              <a:srgbClr val="F59E0B">
-                <a:alpha val="0"/>
-              </a:srgbClr>
-            </a:solidFill>
-            <a:prstDash val="solid"/>
-          </a:ln>
-        </p:spPr>
-      </p:sp>
-      <p:sp>
-        <p:nvSpPr>
-          <p:cNvPr id="14" name="Text 12"/>
+      <p:pic>
+        <p:nvPicPr>
+          <p:cNvPr id="13" name="Image 0" descr="preencoded.png">    </p:cNvPr>
+          <p:cNvPicPr>
+            <a:picLocks noChangeAspect="1"/>
+          </p:cNvPicPr>
+          <p:nvPr/>
+        </p:nvPicPr>
+        <p:blipFill>
+          <a:blip r:embed="rId1">
+            <a:extLst>
+              <a:ext uri="{96DAC541-7B7A-43D3-8B79-37D633B846F1}">
+                <asvg:svgBlip xmlns:asvg="http://schemas.microsoft.com/office/drawing/2016/SVG/main" r:embed="rId2"/>
+              </a:ext>
+            </a:extLst>
+          </a:blip>
+          <a:stretch>
+            <a:fillRect/>
+          </a:stretch>
+        </p:blipFill>
+        <p:spPr>
+          <a:xfrm>
+            <a:off x="914400" y="1417320"/>
+            <a:ext cx="10241280" cy="4526280"/>
+          </a:xfrm>
+          <a:prstGeom prst="rect">
+            <a:avLst/>
+          </a:prstGeom>
+        </p:spPr>
+      </p:pic>
+      <p:sp>
+        <p:nvSpPr>
+          <p:cNvPr id="14" name="Text 11"/>
           <p:cNvSpPr txBox="1"/>
           <p:nvPr/>
         </p:nvSpPr>
@@ -3662,8 +3665,8 @@
           </p:nvPr>
         </p:nvGraphicFramePr>
         <p:xfrm>
-          <a:off x="914400" y="1463040"/>
-          <a:ext cx="10241280" cy="4480560"/>
+          <a:off x="914400" y="1417320"/>
+          <a:ext cx="10241280" cy="4526280"/>
         </p:xfrm>
         <a:graphic>
           <a:graphicData uri="http://schemas.openxmlformats.org/drawingml/2006/table">
@@ -3674,7 +3677,7 @@
                 <a:gridCol w="3413760"/>
                 <a:gridCol w="3413760"/>
               </a:tblGrid>
-              <a:tr h="896112">
+              <a:tr h="905256">
                 <a:tc>
                   <a:txBody>
                     <a:bodyPr/>
@@ -3684,7 +3687,7 @@
                         <a:buNone/>
                       </a:pPr>
                       <a:r>
-                        <a:rPr lang="en-US" sz="2200" b="1" dirty="0">
+                        <a:rPr lang="en-US" sz="1800" b="1" dirty="0">
                           <a:solidFill>
                             <a:srgbClr val="111827"/>
                           </a:solidFill>
@@ -3694,7 +3697,7 @@
                         </a:rPr>
                         <a:t>Object</a:t>
                       </a:r>
-                      <a:endParaRPr lang="en-US" sz="2200" dirty="0">
+                      <a:endParaRPr lang="en-US" sz="1800" dirty="0">
                         <a:latin typeface="Pretendard" charset="0"/>
                         <a:ea typeface="Pretendard" charset="0"/>
                         <a:cs typeface="Pretendard" charset="0"/>
@@ -3752,7 +3755,7 @@
                         <a:buNone/>
                       </a:pPr>
                       <a:r>
-                        <a:rPr lang="en-US" sz="2200" b="1" dirty="0">
+                        <a:rPr lang="en-US" sz="1800" b="1" dirty="0">
                           <a:solidFill>
                             <a:srgbClr val="111827"/>
                           </a:solidFill>
@@ -3762,7 +3765,7 @@
                         </a:rPr>
                         <a:t>Renderer expectation</a:t>
                       </a:r>
-                      <a:endParaRPr lang="en-US" sz="2200" dirty="0">
+                      <a:endParaRPr lang="en-US" sz="1800" dirty="0">
                         <a:latin typeface="Pretendard" charset="0"/>
                         <a:ea typeface="Pretendard" charset="0"/>
                         <a:cs typeface="Pretendard" charset="0"/>
@@ -3820,7 +3823,7 @@
                         <a:buNone/>
                       </a:pPr>
                       <a:r>
-                        <a:rPr lang="en-US" sz="2200" b="1" dirty="0">
+                        <a:rPr lang="en-US" sz="1800" b="1" dirty="0">
                           <a:solidFill>
                             <a:srgbClr val="111827"/>
                           </a:solidFill>
@@ -3830,7 +3833,7 @@
                         </a:rPr>
                         <a:t>QA signal</a:t>
                       </a:r>
-                      <a:endParaRPr lang="en-US" sz="2200" dirty="0">
+                      <a:endParaRPr lang="en-US" sz="1800" dirty="0">
                         <a:latin typeface="Pretendard" charset="0"/>
                         <a:ea typeface="Pretendard" charset="0"/>
                         <a:cs typeface="Pretendard" charset="0"/>
@@ -3880,7 +3883,7 @@
                   </a:tcPr>
                 </a:tc>
               </a:tr>
-              <a:tr h="896112">
+              <a:tr h="905256">
                 <a:tc>
                   <a:txBody>
                     <a:bodyPr/>
@@ -3890,7 +3893,7 @@
                         <a:buNone/>
                       </a:pPr>
                       <a:r>
-                        <a:rPr lang="en-US" sz="2200" b="1" dirty="0">
+                        <a:rPr lang="en-US" sz="1800" b="1" dirty="0">
                           <a:solidFill>
                             <a:srgbClr val="F8FAFC"/>
                           </a:solidFill>
@@ -3900,7 +3903,7 @@
                         </a:rPr>
                         <a:t>Text box</a:t>
                       </a:r>
-                      <a:endParaRPr lang="en-US" sz="2200" dirty="0">
+                      <a:endParaRPr lang="en-US" sz="1800" dirty="0">
                         <a:latin typeface="Pretendard" charset="0"/>
                         <a:ea typeface="Pretendard" charset="0"/>
                         <a:cs typeface="Pretendard" charset="0"/>
@@ -3955,7 +3958,7 @@
                         <a:buNone/>
                       </a:pPr>
                       <a:r>
-                        <a:rPr lang="en-US" sz="2200" dirty="0">
+                        <a:rPr lang="en-US" sz="1800" dirty="0">
                           <a:solidFill>
                             <a:srgbClr val="F8FAFC"/>
                           </a:solidFill>
@@ -3965,7 +3968,7 @@
                         </a:rPr>
                         <a:t>editable, middle aligned</a:t>
                       </a:r>
-                      <a:endParaRPr lang="en-US" sz="2200" dirty="0">
+                      <a:endParaRPr lang="en-US" sz="1800" dirty="0">
                         <a:latin typeface="Pretendard" charset="0"/>
                         <a:ea typeface="Pretendard" charset="0"/>
                         <a:cs typeface="Pretendard" charset="0"/>
@@ -4020,7 +4023,7 @@
                         <a:buNone/>
                       </a:pPr>
                       <a:r>
-                        <a:rPr lang="en-US" sz="2200" dirty="0">
+                        <a:rPr lang="en-US" sz="1800" dirty="0">
                           <a:solidFill>
                             <a:srgbClr val="F8FAFC"/>
                           </a:solidFill>
@@ -4030,7 +4033,7 @@
                         </a:rPr>
                         <a:t>readable minimum size</a:t>
                       </a:r>
-                      <a:endParaRPr lang="en-US" sz="2200" dirty="0">
+                      <a:endParaRPr lang="en-US" sz="1800" dirty="0">
                         <a:latin typeface="Pretendard" charset="0"/>
                         <a:ea typeface="Pretendard" charset="0"/>
                         <a:cs typeface="Pretendard" charset="0"/>
@@ -4077,7 +4080,7 @@
                   </a:tcPr>
                 </a:tc>
               </a:tr>
-              <a:tr h="896112">
+              <a:tr h="905256">
                 <a:tc>
                   <a:txBody>
                     <a:bodyPr/>
@@ -4087,7 +4090,7 @@
                         <a:buNone/>
                       </a:pPr>
                       <a:r>
-                        <a:rPr lang="en-US" sz="2200" b="1" dirty="0">
+                        <a:rPr lang="en-US" sz="1800" b="1" dirty="0">
                           <a:solidFill>
                             <a:srgbClr val="F8FAFC"/>
                           </a:solidFill>
@@ -4097,7 +4100,7 @@
                         </a:rPr>
                         <a:t>Table</a:t>
                       </a:r>
-                      <a:endParaRPr lang="en-US" sz="2200" dirty="0">
+                      <a:endParaRPr lang="en-US" sz="1800" dirty="0">
                         <a:latin typeface="Pretendard" charset="0"/>
                         <a:ea typeface="Pretendard" charset="0"/>
                         <a:cs typeface="Pretendard" charset="0"/>
@@ -4157,7 +4160,7 @@
                         <a:buNone/>
                       </a:pPr>
                       <a:r>
-                        <a:rPr lang="en-US" sz="2200" dirty="0">
+                        <a:rPr lang="en-US" sz="1800" dirty="0">
                           <a:solidFill>
                             <a:srgbClr val="F8FAFC"/>
                           </a:solidFill>
@@ -4167,7 +4170,7 @@
                         </a:rPr>
                         <a:t>native table object</a:t>
                       </a:r>
-                      <a:endParaRPr lang="en-US" sz="2200" dirty="0">
+                      <a:endParaRPr lang="en-US" sz="1800" dirty="0">
                         <a:latin typeface="Pretendard" charset="0"/>
                         <a:ea typeface="Pretendard" charset="0"/>
                         <a:cs typeface="Pretendard" charset="0"/>
@@ -4227,7 +4230,7 @@
                         <a:buNone/>
                       </a:pPr>
                       <a:r>
-                        <a:rPr lang="en-US" sz="2200" dirty="0">
+                        <a:rPr lang="en-US" sz="1800" dirty="0">
                           <a:solidFill>
                             <a:srgbClr val="F8FAFC"/>
                           </a:solidFill>
@@ -4237,7 +4240,7 @@
                         </a:rPr>
                         <a:t>header fill and cell padding</a:t>
                       </a:r>
-                      <a:endParaRPr lang="en-US" sz="2200" dirty="0">
+                      <a:endParaRPr lang="en-US" sz="1800" dirty="0">
                         <a:latin typeface="Pretendard" charset="0"/>
                         <a:ea typeface="Pretendard" charset="0"/>
                         <a:cs typeface="Pretendard" charset="0"/>
@@ -4289,7 +4292,7 @@
                   </a:tcPr>
                 </a:tc>
               </a:tr>
-              <a:tr h="896112">
+              <a:tr h="905256">
                 <a:tc>
                   <a:txBody>
                     <a:bodyPr/>
@@ -4299,7 +4302,7 @@
                         <a:buNone/>
                       </a:pPr>
                       <a:r>
-                        <a:rPr lang="en-US" sz="2200" b="1" dirty="0">
+                        <a:rPr lang="en-US" sz="1800" b="1" dirty="0">
                           <a:solidFill>
                             <a:srgbClr val="F8FAFC"/>
                           </a:solidFill>
@@ -4309,7 +4312,7 @@
                         </a:rPr>
                         <a:t>Diagram</a:t>
                       </a:r>
-                      <a:endParaRPr lang="en-US" sz="2200" dirty="0">
+                      <a:endParaRPr lang="en-US" sz="1800" dirty="0">
                         <a:latin typeface="Pretendard" charset="0"/>
                         <a:ea typeface="Pretendard" charset="0"/>
                         <a:cs typeface="Pretendard" charset="0"/>
@@ -4364,7 +4367,7 @@
                         <a:buNone/>
                       </a:pPr>
                       <a:r>
-                        <a:rPr lang="en-US" sz="2200" dirty="0">
+                        <a:rPr lang="en-US" sz="1800" dirty="0">
                           <a:solidFill>
                             <a:srgbClr val="F8FAFC"/>
                           </a:solidFill>
@@ -4374,7 +4377,7 @@
                         </a:rPr>
                         <a:t>nodes and connectors</a:t>
                       </a:r>
-                      <a:endParaRPr lang="en-US" sz="2200" dirty="0">
+                      <a:endParaRPr lang="en-US" sz="1800" dirty="0">
                         <a:latin typeface="Pretendard" charset="0"/>
                         <a:ea typeface="Pretendard" charset="0"/>
                         <a:cs typeface="Pretendard" charset="0"/>
@@ -4429,7 +4432,7 @@
                         <a:buNone/>
                       </a:pPr>
                       <a:r>
-                        <a:rPr lang="en-US" sz="2200" dirty="0">
+                        <a:rPr lang="en-US" sz="1800" dirty="0">
                           <a:solidFill>
                             <a:srgbClr val="F8FAFC"/>
                           </a:solidFill>
@@ -4439,7 +4442,7 @@
                         </a:rPr>
                         <a:t>no clipped labels</a:t>
                       </a:r>
-                      <a:endParaRPr lang="en-US" sz="2200" dirty="0">
+                      <a:endParaRPr lang="en-US" sz="1800" dirty="0">
                         <a:latin typeface="Pretendard" charset="0"/>
                         <a:ea typeface="Pretendard" charset="0"/>
                         <a:cs typeface="Pretendard" charset="0"/>
@@ -4486,7 +4489,7 @@
                   </a:tcPr>
                 </a:tc>
               </a:tr>
-              <a:tr h="896112">
+              <a:tr h="905256">
                 <a:tc>
                   <a:txBody>
                     <a:bodyPr/>
@@ -4496,7 +4499,7 @@
                         <a:buNone/>
                       </a:pPr>
                       <a:r>
-                        <a:rPr lang="en-US" sz="2200" b="1" dirty="0">
+                        <a:rPr lang="en-US" sz="1800" b="1" dirty="0">
                           <a:solidFill>
                             <a:srgbClr val="F8FAFC"/>
                           </a:solidFill>
@@ -4506,7 +4509,7 @@
                         </a:rPr>
                         <a:t>Chart</a:t>
                       </a:r>
-                      <a:endParaRPr lang="en-US" sz="2200" dirty="0">
+                      <a:endParaRPr lang="en-US" sz="1800" dirty="0">
                         <a:latin typeface="Pretendard" charset="0"/>
                         <a:ea typeface="Pretendard" charset="0"/>
                         <a:cs typeface="Pretendard" charset="0"/>
@@ -4566,7 +4569,7 @@
                         <a:buNone/>
                       </a:pPr>
                       <a:r>
-                        <a:rPr lang="en-US" sz="2200" dirty="0">
+                        <a:rPr lang="en-US" sz="1800" dirty="0">
                           <a:solidFill>
                             <a:srgbClr val="F8FAFC"/>
                           </a:solidFill>
@@ -4576,7 +4579,7 @@
                         </a:rPr>
                         <a:t>theme-colored data object</a:t>
                       </a:r>
-                      <a:endParaRPr lang="en-US" sz="2200" dirty="0">
+                      <a:endParaRPr lang="en-US" sz="1800" dirty="0">
                         <a:latin typeface="Pretendard" charset="0"/>
                         <a:ea typeface="Pretendard" charset="0"/>
                         <a:cs typeface="Pretendard" charset="0"/>
@@ -4636,7 +4639,7 @@
                         <a:buNone/>
                       </a:pPr>
                       <a:r>
-                        <a:rPr lang="en-US" sz="2200" dirty="0">
+                        <a:rPr lang="en-US" sz="1800" dirty="0">
                           <a:solidFill>
                             <a:srgbClr val="F8FAFC"/>
                           </a:solidFill>
@@ -4646,7 +4649,7 @@
                         </a:rPr>
                         <a:t>contrast and value clarity</a:t>
                       </a:r>
-                      <a:endParaRPr lang="en-US" sz="2200" dirty="0">
+                      <a:endParaRPr lang="en-US" sz="1800" dirty="0">
                         <a:latin typeface="Pretendard" charset="0"/>
                         <a:ea typeface="Pretendard" charset="0"/>
                         <a:cs typeface="Pretendard" charset="0"/>
@@ -5648,36 +5651,39 @@
           </a:ln>
         </p:spPr>
       </p:sp>
-      <p:sp>
-        <p:nvSpPr>
-          <p:cNvPr id="13" name="Shape 11"/>
-          <p:cNvSpPr/>
-          <p:nvPr/>
-        </p:nvSpPr>
-        <p:spPr>
-          <a:xfrm>
-            <a:off x="914400" y="1463040"/>
-            <a:ext cx="10241280" cy="73152"/>
-          </a:xfrm>
-          <a:prstGeom prst="rect">
-            <a:avLst/>
-          </a:prstGeom>
-          <a:solidFill>
-            <a:srgbClr val="F59E0B"/>
-          </a:solidFill>
-          <a:ln w="12700">
-            <a:solidFill>
-              <a:srgbClr val="F59E0B">
-                <a:alpha val="0"/>
-              </a:srgbClr>
-            </a:solidFill>
-            <a:prstDash val="solid"/>
-          </a:ln>
-        </p:spPr>
-      </p:sp>
-      <p:sp>
-        <p:nvSpPr>
-          <p:cNvPr id="14" name="Text 12"/>
+      <p:pic>
+        <p:nvPicPr>
+          <p:cNvPr id="13" name="Image 0" descr="preencoded.png">    </p:cNvPr>
+          <p:cNvPicPr>
+            <a:picLocks noChangeAspect="1"/>
+          </p:cNvPicPr>
+          <p:nvPr/>
+        </p:nvPicPr>
+        <p:blipFill>
+          <a:blip r:embed="rId1">
+            <a:extLst>
+              <a:ext uri="{96DAC541-7B7A-43D3-8B79-37D633B846F1}">
+                <asvg:svgBlip xmlns:asvg="http://schemas.microsoft.com/office/drawing/2016/SVG/main" r:embed="rId2"/>
+              </a:ext>
+            </a:extLst>
+          </a:blip>
+          <a:stretch>
+            <a:fillRect/>
+          </a:stretch>
+        </p:blipFill>
+        <p:spPr>
+          <a:xfrm>
+            <a:off x="914400" y="1417320"/>
+            <a:ext cx="10241280" cy="4526280"/>
+          </a:xfrm>
+          <a:prstGeom prst="rect">
+            <a:avLst/>
+          </a:prstGeom>
+        </p:spPr>
+      </p:pic>
+      <p:sp>
+        <p:nvSpPr>
+          <p:cNvPr id="14" name="Text 11"/>
           <p:cNvSpPr txBox="1"/>
           <p:nvPr/>
         </p:nvSpPr>
@@ -5732,8 +5738,8 @@
           </p:nvPr>
         </p:nvGraphicFramePr>
         <p:xfrm>
-          <a:off x="914400" y="1463040"/>
-          <a:ext cx="10241280" cy="4480560"/>
+          <a:off x="914400" y="1417320"/>
+          <a:ext cx="10241280" cy="4526280"/>
         </p:xfrm>
         <a:graphic>
           <a:graphicData uri="http://schemas.openxmlformats.org/drawingml/2006/table">
@@ -5744,7 +5750,7 @@
                 <a:gridCol w="3413760"/>
                 <a:gridCol w="3413760"/>
               </a:tblGrid>
-              <a:tr h="1120140">
+              <a:tr h="1131570">
                 <a:tc>
                   <a:txBody>
                     <a:bodyPr/>
@@ -5754,7 +5760,7 @@
                         <a:buNone/>
                       </a:pPr>
                       <a:r>
-                        <a:rPr lang="en-US" sz="2200" b="1" dirty="0">
+                        <a:rPr lang="en-US" sz="1800" b="1" dirty="0">
                           <a:solidFill>
                             <a:srgbClr val="111827"/>
                           </a:solidFill>
@@ -5764,7 +5770,7 @@
                         </a:rPr>
                         <a:t>Stage</a:t>
                       </a:r>
-                      <a:endParaRPr lang="en-US" sz="2200" dirty="0">
+                      <a:endParaRPr lang="en-US" sz="1800" dirty="0">
                         <a:latin typeface="Pretendard" charset="0"/>
                         <a:ea typeface="Pretendard" charset="0"/>
                         <a:cs typeface="Pretendard" charset="0"/>
@@ -5822,7 +5828,7 @@
                         <a:buNone/>
                       </a:pPr>
                       <a:r>
-                        <a:rPr lang="en-US" sz="2200" b="1" dirty="0">
+                        <a:rPr lang="en-US" sz="1800" b="1" dirty="0">
                           <a:solidFill>
                             <a:srgbClr val="111827"/>
                           </a:solidFill>
@@ -5832,7 +5838,7 @@
                         </a:rPr>
                         <a:t>Coverage</a:t>
                       </a:r>
-                      <a:endParaRPr lang="en-US" sz="2200" dirty="0">
+                      <a:endParaRPr lang="en-US" sz="1800" dirty="0">
                         <a:latin typeface="Pretendard" charset="0"/>
                         <a:ea typeface="Pretendard" charset="0"/>
                         <a:cs typeface="Pretendard" charset="0"/>
@@ -5890,7 +5896,7 @@
                         <a:buNone/>
                       </a:pPr>
                       <a:r>
-                        <a:rPr lang="en-US" sz="2200" b="1" dirty="0">
+                        <a:rPr lang="en-US" sz="1800" b="1" dirty="0">
                           <a:solidFill>
                             <a:srgbClr val="111827"/>
                           </a:solidFill>
@@ -5900,7 +5906,7 @@
                         </a:rPr>
                         <a:t>Defects</a:t>
                       </a:r>
-                      <a:endParaRPr lang="en-US" sz="2200" dirty="0">
+                      <a:endParaRPr lang="en-US" sz="1800" dirty="0">
                         <a:latin typeface="Pretendard" charset="0"/>
                         <a:ea typeface="Pretendard" charset="0"/>
                         <a:cs typeface="Pretendard" charset="0"/>
@@ -5950,7 +5956,7 @@
                   </a:tcPr>
                 </a:tc>
               </a:tr>
-              <a:tr h="1120140">
+              <a:tr h="1131570">
                 <a:tc>
                   <a:txBody>
                     <a:bodyPr/>
@@ -5960,7 +5966,7 @@
                         <a:buNone/>
                       </a:pPr>
                       <a:r>
-                        <a:rPr lang="en-US" sz="2200" b="1" dirty="0">
+                        <a:rPr lang="en-US" sz="1800" b="1" dirty="0">
                           <a:solidFill>
                             <a:srgbClr val="F8FAFC"/>
                           </a:solidFill>
@@ -5970,7 +5976,7 @@
                         </a:rPr>
                         <a:t>Parser</a:t>
                       </a:r>
-                      <a:endParaRPr lang="en-US" sz="2200" dirty="0">
+                      <a:endParaRPr lang="en-US" sz="1800" dirty="0">
                         <a:latin typeface="Pretendard" charset="0"/>
                         <a:ea typeface="Pretendard" charset="0"/>
                         <a:cs typeface="Pretendard" charset="0"/>
@@ -6025,7 +6031,7 @@
                         <a:buNone/>
                       </a:pPr>
                       <a:r>
-                        <a:rPr lang="en-US" sz="2200" dirty="0">
+                        <a:rPr lang="en-US" sz="1800" dirty="0">
                           <a:solidFill>
                             <a:srgbClr val="F8FAFC"/>
                           </a:solidFill>
@@ -6035,7 +6041,7 @@
                         </a:rPr>
                         <a:t>92</a:t>
                       </a:r>
-                      <a:endParaRPr lang="en-US" sz="2200" dirty="0">
+                      <a:endParaRPr lang="en-US" sz="1800" dirty="0">
                         <a:latin typeface="Pretendard" charset="0"/>
                         <a:ea typeface="Pretendard" charset="0"/>
                         <a:cs typeface="Pretendard" charset="0"/>
@@ -6090,7 +6096,7 @@
                         <a:buNone/>
                       </a:pPr>
                       <a:r>
-                        <a:rPr lang="en-US" sz="2200" dirty="0">
+                        <a:rPr lang="en-US" sz="1800" dirty="0">
                           <a:solidFill>
                             <a:srgbClr val="F8FAFC"/>
                           </a:solidFill>
@@ -6100,7 +6106,7 @@
                         </a:rPr>
                         <a:t>3</a:t>
                       </a:r>
-                      <a:endParaRPr lang="en-US" sz="2200" dirty="0">
+                      <a:endParaRPr lang="en-US" sz="1800" dirty="0">
                         <a:latin typeface="Pretendard" charset="0"/>
                         <a:ea typeface="Pretendard" charset="0"/>
                         <a:cs typeface="Pretendard" charset="0"/>
@@ -6147,7 +6153,7 @@
                   </a:tcPr>
                 </a:tc>
               </a:tr>
-              <a:tr h="1120140">
+              <a:tr h="1131570">
                 <a:tc>
                   <a:txBody>
                     <a:bodyPr/>
@@ -6157,7 +6163,7 @@
                         <a:buNone/>
                       </a:pPr>
                       <a:r>
-                        <a:rPr lang="en-US" sz="2200" b="1" dirty="0">
+                        <a:rPr lang="en-US" sz="1800" b="1" dirty="0">
                           <a:solidFill>
                             <a:srgbClr val="F8FAFC"/>
                           </a:solidFill>
@@ -6167,7 +6173,7 @@
                         </a:rPr>
                         <a:t>Layout</a:t>
                       </a:r>
-                      <a:endParaRPr lang="en-US" sz="2200" dirty="0">
+                      <a:endParaRPr lang="en-US" sz="1800" dirty="0">
                         <a:latin typeface="Pretendard" charset="0"/>
                         <a:ea typeface="Pretendard" charset="0"/>
                         <a:cs typeface="Pretendard" charset="0"/>
@@ -6227,7 +6233,7 @@
                         <a:buNone/>
                       </a:pPr>
                       <a:r>
-                        <a:rPr lang="en-US" sz="2200" dirty="0">
+                        <a:rPr lang="en-US" sz="1800" dirty="0">
                           <a:solidFill>
                             <a:srgbClr val="F8FAFC"/>
                           </a:solidFill>
@@ -6237,7 +6243,7 @@
                         </a:rPr>
                         <a:t>88</a:t>
                       </a:r>
-                      <a:endParaRPr lang="en-US" sz="2200" dirty="0">
+                      <a:endParaRPr lang="en-US" sz="1800" dirty="0">
                         <a:latin typeface="Pretendard" charset="0"/>
                         <a:ea typeface="Pretendard" charset="0"/>
                         <a:cs typeface="Pretendard" charset="0"/>
@@ -6297,7 +6303,7 @@
                         <a:buNone/>
                       </a:pPr>
                       <a:r>
-                        <a:rPr lang="en-US" sz="2200" dirty="0">
+                        <a:rPr lang="en-US" sz="1800" dirty="0">
                           <a:solidFill>
                             <a:srgbClr val="F8FAFC"/>
                           </a:solidFill>
@@ -6307,7 +6313,7 @@
                         </a:rPr>
                         <a:t>5</a:t>
                       </a:r>
-                      <a:endParaRPr lang="en-US" sz="2200" dirty="0">
+                      <a:endParaRPr lang="en-US" sz="1800" dirty="0">
                         <a:latin typeface="Pretendard" charset="0"/>
                         <a:ea typeface="Pretendard" charset="0"/>
                         <a:cs typeface="Pretendard" charset="0"/>
@@ -6359,7 +6365,7 @@
                   </a:tcPr>
                 </a:tc>
               </a:tr>
-              <a:tr h="1120140">
+              <a:tr h="1131570">
                 <a:tc>
                   <a:txBody>
                     <a:bodyPr/>
@@ -6369,7 +6375,7 @@
                         <a:buNone/>
                       </a:pPr>
                       <a:r>
-                        <a:rPr lang="en-US" sz="2200" b="1" dirty="0">
+                        <a:rPr lang="en-US" sz="1800" b="1" dirty="0">
                           <a:solidFill>
                             <a:srgbClr val="F8FAFC"/>
                           </a:solidFill>
@@ -6379,7 +6385,7 @@
                         </a:rPr>
                         <a:t>PPTX</a:t>
                       </a:r>
-                      <a:endParaRPr lang="en-US" sz="2200" dirty="0">
+                      <a:endParaRPr lang="en-US" sz="1800" dirty="0">
                         <a:latin typeface="Pretendard" charset="0"/>
                         <a:ea typeface="Pretendard" charset="0"/>
                         <a:cs typeface="Pretendard" charset="0"/>
@@ -6434,7 +6440,7 @@
                         <a:buNone/>
                       </a:pPr>
                       <a:r>
-                        <a:rPr lang="en-US" sz="2200" dirty="0">
+                        <a:rPr lang="en-US" sz="1800" dirty="0">
                           <a:solidFill>
                             <a:srgbClr val="F8FAFC"/>
                           </a:solidFill>
@@ -6444,7 +6450,7 @@
                         </a:rPr>
                         <a:t>95</a:t>
                       </a:r>
-                      <a:endParaRPr lang="en-US" sz="2200" dirty="0">
+                      <a:endParaRPr lang="en-US" sz="1800" dirty="0">
                         <a:latin typeface="Pretendard" charset="0"/>
                         <a:ea typeface="Pretendard" charset="0"/>
                         <a:cs typeface="Pretendard" charset="0"/>
@@ -6499,7 +6505,7 @@
                         <a:buNone/>
                       </a:pPr>
                       <a:r>
-                        <a:rPr lang="en-US" sz="2200" dirty="0">
+                        <a:rPr lang="en-US" sz="1800" dirty="0">
                           <a:solidFill>
                             <a:srgbClr val="F8FAFC"/>
                           </a:solidFill>
@@ -6509,7 +6515,7 @@
                         </a:rPr>
                         <a:t>2</a:t>
                       </a:r>
-                      <a:endParaRPr lang="en-US" sz="2200" dirty="0">
+                      <a:endParaRPr lang="en-US" sz="1800" dirty="0">
                         <a:latin typeface="Pretendard" charset="0"/>
                         <a:ea typeface="Pretendard" charset="0"/>
                         <a:cs typeface="Pretendard" charset="0"/>
